--- a/Pregrado/Investigacion en ciencia y tecnologia/Clases/Sesion 04 - Problema y pregunta · bases de datos y gestores de citas/Presentacion.pptx
+++ b/Pregrado/Investigacion en ciencia y tecnologia/Clases/Sesion 04 - Problema y pregunta · bases de datos y gestores de citas/Presentacion.pptx
@@ -36,6 +36,8 @@
     <p:sldId id="284" r:id="rId35"/>
     <p:sldId id="285" r:id="rId36"/>
     <p:sldId id="286" r:id="rId37"/>
+    <p:sldId id="287" r:id="rId38"/>
+    <p:sldId id="288" r:id="rId39"/>
   </p:sldIdLst>
   <p:sldSz cx="12191695" cy="6858000" type="screen4x3"/>
   <p:notesSz cx="6858000" cy="9144000"/>
@@ -11854,7 +11856,7 @@
                 </a:solidFill>
                 <a:latin typeface="Calibri"/>
               </a:rPr>
-              <a:t>TALLER · Pregunta + tres fuentes citadas (~24 min)</a:t>
+              <a:t>TALLER · Pregunta + tres fuentes citadas</a:t>
             </a:r>
           </a:p>
         </p:txBody>
@@ -11867,8 +11869,8 @@
         </p:nvSpPr>
         <p:spPr>
           <a:xfrm>
-            <a:off x="640080" y="1691639"/>
-            <a:ext cx="10911535" cy="4617720"/>
+            <a:off x="640080" y="1280160"/>
+            <a:ext cx="10911535" cy="411480"/>
           </a:xfrm>
           <a:prstGeom prst="rect">
             <a:avLst/>
@@ -11881,13 +11883,48 @@
           </a:bodyPr>
           <a:lstStyle/>
           <a:p>
+            <a:pPr algn="ctr"/>
+            <a:r>
+              <a:rPr sz="1500" b="0" i="0">
+                <a:solidFill>
+                  <a:srgbClr val="2B2B2B"/>
+                </a:solidFill>
+                <a:latin typeface="Calibri"/>
+              </a:rPr>
+              <a:t>Individual · el Docente pasa acompañando · todo en el navegador</a:t>
+            </a:r>
+          </a:p>
+        </p:txBody>
+      </p:sp>
+      <p:sp>
+        <p:nvSpPr>
+          <p:cNvPr id="5" name="TextBox 4"/>
+          <p:cNvSpPr txBox="1"/>
+          <p:nvPr/>
+        </p:nvSpPr>
+        <p:spPr>
+          <a:xfrm>
+            <a:off x="640080" y="2011679"/>
+            <a:ext cx="10911535" cy="4297680"/>
+          </a:xfrm>
+          <a:prstGeom prst="rect">
+            <a:avLst/>
+          </a:prstGeom>
+          <a:noFill/>
+        </p:spPr>
+        <p:txBody>
+          <a:bodyPr wrap="square" anchor="t" lIns="0" rIns="0" tIns="0" bIns="0">
+            <a:spAutoFit/>
+          </a:bodyPr>
+          <a:lstStyle/>
+          <a:p>
             <a:pPr>
               <a:spcAft>
                 <a:spcPts val="1000"/>
               </a:spcAft>
             </a:pPr>
             <a:r>
-              <a:rPr sz="1500" b="0" i="0">
+              <a:rPr sz="1600" b="0" i="0">
                 <a:solidFill>
                   <a:srgbClr val="2B2B2B"/>
                 </a:solidFill>
@@ -11896,399 +11933,22 @@
               <a:t>–   </a:t>
             </a:r>
             <a:r>
-              <a:rPr sz="1500" b="1" i="0">
-                <a:solidFill>
-                  <a:srgbClr val="2B2B2B"/>
-                </a:solidFill>
-                <a:latin typeface="Calibri"/>
-              </a:rPr>
-              <a:t>Consigna literal.</a:t>
-            </a:r>
-            <a:r>
-              <a:rPr sz="1500" b="0" i="0">
-                <a:solidFill>
-                  <a:srgbClr val="2B2B2B"/>
-                </a:solidFill>
-                <a:latin typeface="Calibri"/>
-              </a:rPr>
-              <a:t> En un documento llamado `S04_ProblemaPreguntaFuentes_Apellido`:</a:t>
-            </a:r>
-          </a:p>
-          <a:p>
-            <a:pPr lvl="1">
-              <a:spcAft>
-                <a:spcPts val="600"/>
-              </a:spcAft>
-            </a:pPr>
-            <a:r>
-              <a:rPr sz="1400" b="0" i="0">
-                <a:solidFill>
-                  <a:srgbClr val="2B2B2B"/>
-                </a:solidFill>
-                <a:latin typeface="Calibri"/>
-              </a:rPr>
-              <a:t>●   </a:t>
-            </a:r>
-            <a:r>
-              <a:rPr sz="1400" b="1" i="0">
-                <a:solidFill>
-                  <a:srgbClr val="2B2B2B"/>
-                </a:solidFill>
-                <a:latin typeface="Calibri"/>
-              </a:rPr>
-              <a:t>(1)</a:t>
-            </a:r>
-            <a:r>
-              <a:rPr sz="1400" b="0" i="0">
-                <a:solidFill>
-                  <a:srgbClr val="2B2B2B"/>
-                </a:solidFill>
-                <a:latin typeface="Calibri"/>
-              </a:rPr>
-              <a:t> Describa el problema en </a:t>
-            </a:r>
-            <a:r>
-              <a:rPr sz="1400" b="1" i="0">
-                <a:solidFill>
-                  <a:srgbClr val="2B2B2B"/>
-                </a:solidFill>
-                <a:latin typeface="Calibri"/>
-              </a:rPr>
-              <a:t>8 a 12 líneas</a:t>
-            </a:r>
-            <a:r>
-              <a:rPr sz="1400" b="0" i="0">
-                <a:solidFill>
-                  <a:srgbClr val="2B2B2B"/>
-                </a:solidFill>
-                <a:latin typeface="Calibri"/>
-              </a:rPr>
-              <a:t>, como un hecho con consecuencias, </a:t>
-            </a:r>
-            <a:r>
-              <a:rPr sz="1400" b="1" i="0">
-                <a:solidFill>
-                  <a:srgbClr val="2B2B2B"/>
-                </a:solidFill>
-                <a:latin typeface="Calibri"/>
-              </a:rPr>
-              <a:t>no</a:t>
-            </a:r>
-            <a:r>
-              <a:rPr sz="1400" b="0" i="0">
-                <a:solidFill>
-                  <a:srgbClr val="2B2B2B"/>
-                </a:solidFill>
-                <a:latin typeface="Calibri"/>
-              </a:rPr>
-              <a:t> como la falta de su solución. </a:t>
-            </a:r>
-            <a:r>
-              <a:rPr sz="1400" b="1" i="0">
-                <a:solidFill>
-                  <a:srgbClr val="2B2B2B"/>
-                </a:solidFill>
-                <a:latin typeface="Calibri"/>
-              </a:rPr>
-              <a:t>(6 min)</a:t>
-            </a:r>
-          </a:p>
-          <a:p>
-            <a:pPr lvl="1">
-              <a:spcAft>
-                <a:spcPts val="600"/>
-              </a:spcAft>
-            </a:pPr>
-            <a:r>
-              <a:rPr sz="1400" b="0" i="0">
-                <a:solidFill>
-                  <a:srgbClr val="2B2B2B"/>
-                </a:solidFill>
-                <a:latin typeface="Calibri"/>
-              </a:rPr>
-              <a:t>●   </a:t>
-            </a:r>
-            <a:r>
-              <a:rPr sz="1400" b="1" i="0">
-                <a:solidFill>
-                  <a:srgbClr val="2B2B2B"/>
-                </a:solidFill>
-                <a:latin typeface="Calibri"/>
-              </a:rPr>
-              <a:t>(2)</a:t>
-            </a:r>
-            <a:r>
-              <a:rPr sz="1400" b="0" i="0">
-                <a:solidFill>
-                  <a:srgbClr val="2B2B2B"/>
-                </a:solidFill>
-                <a:latin typeface="Calibri"/>
-              </a:rPr>
-              <a:t> Haga un diagrama en </a:t>
-            </a:r>
-            <a:r>
-              <a:rPr sz="1400" b="1" i="0">
-                <a:solidFill>
-                  <a:srgbClr val="2B2B2B"/>
-                </a:solidFill>
-                <a:latin typeface="Calibri"/>
-              </a:rPr>
-              <a:t>Excalidraw</a:t>
-            </a:r>
-            <a:r>
-              <a:rPr sz="1400" b="0" i="0">
-                <a:solidFill>
-                  <a:srgbClr val="2B2B2B"/>
-                </a:solidFill>
-                <a:latin typeface="Calibri"/>
-              </a:rPr>
-              <a:t> —espina de pescado o árbol de problemas— y pegue la captura. </a:t>
-            </a:r>
-            <a:r>
-              <a:rPr sz="1400" b="1" i="0">
-                <a:solidFill>
-                  <a:srgbClr val="2B2B2B"/>
-                </a:solidFill>
-                <a:latin typeface="Calibri"/>
-              </a:rPr>
-              <a:t>(5 min)</a:t>
-            </a:r>
-          </a:p>
-          <a:p>
-            <a:pPr lvl="1">
-              <a:spcAft>
-                <a:spcPts val="600"/>
-              </a:spcAft>
-            </a:pPr>
-            <a:r>
-              <a:rPr sz="1400" b="0" i="0">
-                <a:solidFill>
-                  <a:srgbClr val="2B2B2B"/>
-                </a:solidFill>
-                <a:latin typeface="Calibri"/>
-              </a:rPr>
-              <a:t>●   </a:t>
-            </a:r>
-            <a:r>
-              <a:rPr sz="1400" b="1" i="0">
-                <a:solidFill>
-                  <a:srgbClr val="2B2B2B"/>
-                </a:solidFill>
-                <a:latin typeface="Calibri"/>
-              </a:rPr>
-              <a:t>(3)</a:t>
-            </a:r>
-            <a:r>
-              <a:rPr sz="1400" b="0" i="0">
-                <a:solidFill>
-                  <a:srgbClr val="2B2B2B"/>
-                </a:solidFill>
-                <a:latin typeface="Calibri"/>
-              </a:rPr>
-              <a:t> Escriba la pregunta en </a:t>
-            </a:r>
-            <a:r>
-              <a:rPr sz="1400" b="1" i="0">
-                <a:solidFill>
-                  <a:srgbClr val="2B2B2B"/>
-                </a:solidFill>
-                <a:latin typeface="Calibri"/>
-              </a:rPr>
-              <a:t>una sola frase</a:t>
-            </a:r>
-            <a:r>
-              <a:rPr sz="1400" b="0" i="0">
-                <a:solidFill>
-                  <a:srgbClr val="2B2B2B"/>
-                </a:solidFill>
-                <a:latin typeface="Calibri"/>
-              </a:rPr>
-              <a:t> investigable. </a:t>
-            </a:r>
-            <a:r>
-              <a:rPr sz="1400" b="1" i="0">
-                <a:solidFill>
-                  <a:srgbClr val="2B2B2B"/>
-                </a:solidFill>
-                <a:latin typeface="Calibri"/>
-              </a:rPr>
-              <a:t>(3 min)</a:t>
-            </a:r>
-          </a:p>
-          <a:p>
-            <a:pPr lvl="1">
-              <a:spcAft>
-                <a:spcPts val="600"/>
-              </a:spcAft>
-            </a:pPr>
-            <a:r>
-              <a:rPr sz="1400" b="0" i="0">
-                <a:solidFill>
-                  <a:srgbClr val="2B2B2B"/>
-                </a:solidFill>
-                <a:latin typeface="Calibri"/>
-              </a:rPr>
-              <a:t>●   </a:t>
-            </a:r>
-            <a:r>
-              <a:rPr sz="1400" b="1" i="0">
-                <a:solidFill>
-                  <a:srgbClr val="2B2B2B"/>
-                </a:solidFill>
-                <a:latin typeface="Calibri"/>
-              </a:rPr>
-              <a:t>(4)</a:t>
-            </a:r>
-            <a:r>
-              <a:rPr sz="1400" b="0" i="0">
-                <a:solidFill>
-                  <a:srgbClr val="2B2B2B"/>
-                </a:solidFill>
-                <a:latin typeface="Calibri"/>
-              </a:rPr>
-              <a:t> Busque en </a:t>
-            </a:r>
-            <a:r>
-              <a:rPr sz="1400" b="1" i="0">
-                <a:solidFill>
-                  <a:srgbClr val="2B2B2B"/>
-                </a:solidFill>
-                <a:latin typeface="Calibri"/>
-              </a:rPr>
-              <a:t>Google Académico</a:t>
-            </a:r>
-            <a:r>
-              <a:rPr sz="1400" b="0" i="0">
-                <a:solidFill>
-                  <a:srgbClr val="2B2B2B"/>
-                </a:solidFill>
-                <a:latin typeface="Calibri"/>
-              </a:rPr>
-              <a:t> y en </a:t>
-            </a:r>
-            <a:r>
-              <a:rPr sz="1400" b="1" i="0">
-                <a:solidFill>
-                  <a:srgbClr val="2B2B2B"/>
-                </a:solidFill>
-                <a:latin typeface="Calibri"/>
-              </a:rPr>
-              <a:t>SciELO o Redalyc</a:t>
-            </a:r>
-            <a:r>
-              <a:rPr sz="1400" b="0" i="0">
-                <a:solidFill>
-                  <a:srgbClr val="2B2B2B"/>
-                </a:solidFill>
-                <a:latin typeface="Calibri"/>
-              </a:rPr>
-              <a:t>, y quédese con </a:t>
-            </a:r>
-            <a:r>
-              <a:rPr sz="1400" b="1" i="0">
-                <a:solidFill>
-                  <a:srgbClr val="2B2B2B"/>
-                </a:solidFill>
-                <a:latin typeface="Calibri"/>
-              </a:rPr>
-              <a:t>3 fuentes</a:t>
-            </a:r>
-            <a:r>
-              <a:rPr sz="1400" b="0" i="0">
-                <a:solidFill>
-                  <a:srgbClr val="2B2B2B"/>
-                </a:solidFill>
-                <a:latin typeface="Calibri"/>
-              </a:rPr>
-              <a:t> que pasen el filtro de 60 segundos. </a:t>
-            </a:r>
-            <a:r>
-              <a:rPr sz="1400" b="1" i="0">
-                <a:solidFill>
-                  <a:srgbClr val="2B2B2B"/>
-                </a:solidFill>
-                <a:latin typeface="Calibri"/>
-              </a:rPr>
-              <a:t>(6 min)</a:t>
-            </a:r>
-          </a:p>
-          <a:p>
-            <a:pPr lvl="1">
-              <a:spcAft>
-                <a:spcPts val="600"/>
-              </a:spcAft>
-            </a:pPr>
-            <a:r>
-              <a:rPr sz="1400" b="0" i="0">
-                <a:solidFill>
-                  <a:srgbClr val="2B2B2B"/>
-                </a:solidFill>
-                <a:latin typeface="Calibri"/>
-              </a:rPr>
-              <a:t>●   </a:t>
-            </a:r>
-            <a:r>
-              <a:rPr sz="1400" b="1" i="0">
-                <a:solidFill>
-                  <a:srgbClr val="2B2B2B"/>
-                </a:solidFill>
-                <a:latin typeface="Calibri"/>
-              </a:rPr>
-              <a:t>(5)</a:t>
-            </a:r>
-            <a:r>
-              <a:rPr sz="1400" b="0" i="0">
-                <a:solidFill>
-                  <a:srgbClr val="2B2B2B"/>
-                </a:solidFill>
-                <a:latin typeface="Calibri"/>
-              </a:rPr>
-              <a:t> Genere las </a:t>
-            </a:r>
-            <a:r>
-              <a:rPr sz="1400" b="1" i="0">
-                <a:solidFill>
-                  <a:srgbClr val="2B2B2B"/>
-                </a:solidFill>
-                <a:latin typeface="Calibri"/>
-              </a:rPr>
-              <a:t>3 referencias en APA 7</a:t>
-            </a:r>
-            <a:r>
-              <a:rPr sz="1400" b="0" i="0">
-                <a:solidFill>
-                  <a:srgbClr val="2B2B2B"/>
-                </a:solidFill>
-                <a:latin typeface="Calibri"/>
-              </a:rPr>
-              <a:t> con </a:t>
-            </a:r>
-            <a:r>
-              <a:rPr sz="1400" b="1" i="0">
-                <a:solidFill>
-                  <a:srgbClr val="2B2B2B"/>
-                </a:solidFill>
-                <a:latin typeface="Calibri"/>
-              </a:rPr>
-              <a:t>ZoteroBib</a:t>
-            </a:r>
-            <a:r>
-              <a:rPr sz="1400" b="0" i="0">
-                <a:solidFill>
-                  <a:srgbClr val="2B2B2B"/>
-                </a:solidFill>
-                <a:latin typeface="Calibri"/>
-              </a:rPr>
-              <a:t>, revíselas a mano y péguelas bajo *Referencias*. </a:t>
-            </a:r>
-            <a:r>
-              <a:rPr sz="1400" b="1" i="0">
-                <a:solidFill>
-                  <a:srgbClr val="2B2B2B"/>
-                </a:solidFill>
-                <a:latin typeface="Calibri"/>
-              </a:rPr>
-              <a:t>(4 min)</a:t>
+              <a:rPr sz="1600" b="1" i="0">
+                <a:solidFill>
+                  <a:srgbClr val="2B2B2B"/>
+                </a:solidFill>
+                <a:latin typeface="Calibri"/>
+              </a:rPr>
+              <a:t>Al final tiene:</a:t>
+            </a:r>
+            <a:r>
+              <a:rPr sz="1600" b="0" i="0">
+                <a:solidFill>
+                  <a:srgbClr val="2B2B2B"/>
+                </a:solidFill>
+                <a:latin typeface="Calibri"/>
+              </a:rPr>
+              <a:t> el problema en 8–12 líneas, el diagrama, la pregunta y 3 fuentes citadas en APA 7.</a:t>
             </a:r>
           </a:p>
           <a:p>
@@ -12298,7 +11958,7 @@
               </a:spcAft>
             </a:pPr>
             <a:r>
-              <a:rPr sz="1500" b="0" i="0">
+              <a:rPr sz="1600" b="0" i="0">
                 <a:solidFill>
                   <a:srgbClr val="2B2B2B"/>
                 </a:solidFill>
@@ -12307,22 +11967,58 @@
               <a:t>–   </a:t>
             </a:r>
             <a:r>
-              <a:rPr sz="1500" b="1" i="0">
-                <a:solidFill>
-                  <a:srgbClr val="2B2B2B"/>
-                </a:solidFill>
-                <a:latin typeface="Calibri"/>
-              </a:rPr>
-              <a:t>Empiece por el diagrama:</a:t>
-            </a:r>
-            <a:r>
-              <a:rPr sz="1500" b="0" i="0">
-                <a:solidFill>
-                  <a:srgbClr val="2B2B2B"/>
-                </a:solidFill>
-                <a:latin typeface="Calibri"/>
-              </a:rPr>
-              <a:t> pensar dibujando desatasca más rápido que pensar escribiendo.</a:t>
+              <a:rPr sz="1600" b="1" i="0">
+                <a:solidFill>
+                  <a:srgbClr val="2B2B2B"/>
+                </a:solidFill>
+                <a:latin typeface="Calibri"/>
+              </a:rPr>
+              <a:t>Paso 1</a:t>
+            </a:r>
+            <a:r>
+              <a:rPr sz="1600" b="0" i="0">
+                <a:solidFill>
+                  <a:srgbClr val="2B2B2B"/>
+                </a:solidFill>
+                <a:latin typeface="Calibri"/>
+              </a:rPr>
+              <a:t> · Describa el problema en </a:t>
+            </a:r>
+            <a:r>
+              <a:rPr sz="1600" b="1" i="0">
+                <a:solidFill>
+                  <a:srgbClr val="2B2B2B"/>
+                </a:solidFill>
+                <a:latin typeface="Calibri"/>
+              </a:rPr>
+              <a:t>8 a 12 líneas</a:t>
+            </a:r>
+            <a:r>
+              <a:rPr sz="1600" b="0" i="0">
+                <a:solidFill>
+                  <a:srgbClr val="2B2B2B"/>
+                </a:solidFill>
+                <a:latin typeface="Calibri"/>
+              </a:rPr>
+              <a:t>, como un hecho con consecuencias, </a:t>
+            </a:r>
+            <a:r>
+              <a:rPr sz="1600" b="1" i="0">
+                <a:solidFill>
+                  <a:srgbClr val="2B2B2B"/>
+                </a:solidFill>
+                <a:latin typeface="Calibri"/>
+              </a:rPr>
+              <a:t>no</a:t>
+            </a:r>
+            <a:r>
+              <a:rPr sz="1600" b="0" i="0">
+                <a:solidFill>
+                  <a:srgbClr val="2B2B2B"/>
+                </a:solidFill>
+                <a:latin typeface="Calibri"/>
+              </a:rPr>
+              <a:t> como la falta de su solución.</a:t>
             </a:r>
           </a:p>
           <a:p>
@@ -12332,7 +12028,7 @@
               </a:spcAft>
             </a:pPr>
             <a:r>
-              <a:rPr sz="1500" b="0" i="0">
+              <a:rPr sz="1600" b="0" i="0">
                 <a:solidFill>
                   <a:srgbClr val="2B2B2B"/>
                 </a:solidFill>
@@ -12341,112 +12037,58 @@
               <a:t>–   </a:t>
             </a:r>
             <a:r>
-              <a:rPr sz="1500" b="1" i="0">
-                <a:solidFill>
-                  <a:srgbClr val="2B2B2B"/>
-                </a:solidFill>
-                <a:latin typeface="Calibri"/>
-              </a:rPr>
-              <a:t>Criterio de éxito (verificable):</a:t>
-            </a:r>
-            <a:r>
-              <a:rPr sz="1500" b="0" i="0">
-                <a:solidFill>
-                  <a:srgbClr val="2B2B2B"/>
-                </a:solidFill>
-                <a:latin typeface="Calibri"/>
-              </a:rPr>
-              <a:t> su pregunta </a:t>
-            </a:r>
-            <a:r>
-              <a:rPr sz="1500" b="1" i="0">
-                <a:solidFill>
-                  <a:srgbClr val="2B2B2B"/>
-                </a:solidFill>
-                <a:latin typeface="Calibri"/>
-              </a:rPr>
-              <a:t>tiene actor y contexto</a:t>
-            </a:r>
-            <a:r>
-              <a:rPr sz="1500" b="0" i="0">
-                <a:solidFill>
-                  <a:srgbClr val="2B2B2B"/>
-                </a:solidFill>
-                <a:latin typeface="Calibri"/>
-              </a:rPr>
-              <a:t>, </a:t>
-            </a:r>
-            <a:r>
-              <a:rPr sz="1500" b="1" i="0">
-                <a:solidFill>
-                  <a:srgbClr val="2B2B2B"/>
-                </a:solidFill>
-                <a:latin typeface="Calibri"/>
-              </a:rPr>
-              <a:t>no</a:t>
-            </a:r>
-            <a:r>
-              <a:rPr sz="1500" b="0" i="0">
-                <a:solidFill>
-                  <a:srgbClr val="2B2B2B"/>
-                </a:solidFill>
-                <a:latin typeface="Calibri"/>
-              </a:rPr>
-              <a:t> se responde con sí/no, el diagrama muestra </a:t>
-            </a:r>
-            <a:r>
-              <a:rPr sz="1500" b="1" i="0">
-                <a:solidFill>
-                  <a:srgbClr val="2B2B2B"/>
-                </a:solidFill>
-                <a:latin typeface="Calibri"/>
-              </a:rPr>
-              <a:t>al menos tres causas</a:t>
-            </a:r>
-            <a:r>
-              <a:rPr sz="1500" b="0" i="0">
-                <a:solidFill>
-                  <a:srgbClr val="2B2B2B"/>
-                </a:solidFill>
-                <a:latin typeface="Calibri"/>
-              </a:rPr>
-              <a:t> en familias distintas, y las </a:t>
-            </a:r>
-            <a:r>
-              <a:rPr sz="1500" b="1" i="0">
-                <a:solidFill>
-                  <a:srgbClr val="2B2B2B"/>
-                </a:solidFill>
-                <a:latin typeface="Calibri"/>
-              </a:rPr>
-              <a:t>3 referencias</a:t>
-            </a:r>
-            <a:r>
-              <a:rPr sz="1500" b="0" i="0">
-                <a:solidFill>
-                  <a:srgbClr val="2B2B2B"/>
-                </a:solidFill>
-                <a:latin typeface="Calibri"/>
-              </a:rPr>
-              <a:t> están completas —autor, año, título, fuente— y usted </a:t>
-            </a:r>
-            <a:r>
-              <a:rPr sz="1500" b="1" i="0">
-                <a:solidFill>
-                  <a:srgbClr val="2B2B2B"/>
-                </a:solidFill>
-                <a:latin typeface="Calibri"/>
-              </a:rPr>
-              <a:t>abrió las tres</a:t>
-            </a:r>
-            <a:r>
-              <a:rPr sz="1500" b="0" i="0">
-                <a:solidFill>
-                  <a:srgbClr val="2B2B2B"/>
-                </a:solidFill>
-                <a:latin typeface="Calibri"/>
-              </a:rPr>
-              <a:t>.</a:t>
+              <a:rPr sz="1600" b="1" i="0">
+                <a:solidFill>
+                  <a:srgbClr val="2B2B2B"/>
+                </a:solidFill>
+                <a:latin typeface="Calibri"/>
+              </a:rPr>
+              <a:t>Paso 2</a:t>
+            </a:r>
+            <a:r>
+              <a:rPr sz="1600" b="0" i="0">
+                <a:solidFill>
+                  <a:srgbClr val="2B2B2B"/>
+                </a:solidFill>
+                <a:latin typeface="Calibri"/>
+              </a:rPr>
+              <a:t> · Haga el diagrama en </a:t>
+            </a:r>
+            <a:r>
+              <a:rPr sz="1600" b="1" i="0">
+                <a:solidFill>
+                  <a:srgbClr val="2B2B2B"/>
+                </a:solidFill>
+                <a:latin typeface="Calibri"/>
+              </a:rPr>
+              <a:t>Excalidraw</a:t>
+            </a:r>
+            <a:r>
+              <a:rPr sz="1600" b="0" i="0">
+                <a:solidFill>
+                  <a:srgbClr val="2B2B2B"/>
+                </a:solidFill>
+                <a:latin typeface="Calibri"/>
+              </a:rPr>
+              <a:t> —espina de pescado o árbol de problemas— y pegue la captura. </a:t>
+            </a:r>
+            <a:r>
+              <a:rPr sz="1600" b="1" i="0">
+                <a:solidFill>
+                  <a:srgbClr val="2B2B2B"/>
+                </a:solidFill>
+                <a:latin typeface="Calibri"/>
+              </a:rPr>
+              <a:t>Empiece por aquí:</a:t>
+            </a:r>
+            <a:r>
+              <a:rPr sz="1600" b="0" i="0">
+                <a:solidFill>
+                  <a:srgbClr val="2B2B2B"/>
+                </a:solidFill>
+                <a:latin typeface="Calibri"/>
+              </a:rPr>
+              <a:t> pensar dibujando desatasca más rápido que pensar escribiendo.</a:t>
             </a:r>
           </a:p>
           <a:p>
@@ -12456,20 +12098,266 @@
               </a:spcAft>
             </a:pPr>
             <a:r>
-              <a:rPr sz="1500" b="0" i="0">
-                <a:solidFill>
-                  <a:srgbClr val="2B2B2B"/>
-                </a:solidFill>
-                <a:latin typeface="Calibri"/>
-              </a:rPr>
-              <a:t>–   Prueba final antes de entregar: lea su pregunta a un compañero. Si tiene que explicársela, todavía no es clara.</a:t>
-            </a:r>
-          </a:p>
-        </p:txBody>
-      </p:sp>
-      <p:sp>
-        <p:nvSpPr>
-          <p:cNvPr id="5" name="TextBox 4"/>
+              <a:rPr sz="1600" b="0" i="0">
+                <a:solidFill>
+                  <a:srgbClr val="2B2B2B"/>
+                </a:solidFill>
+                <a:latin typeface="Calibri"/>
+              </a:rPr>
+              <a:t>–   </a:t>
+            </a:r>
+            <a:r>
+              <a:rPr sz="1600" b="1" i="0">
+                <a:solidFill>
+                  <a:srgbClr val="2B2B2B"/>
+                </a:solidFill>
+                <a:latin typeface="Calibri"/>
+              </a:rPr>
+              <a:t>Paso 3</a:t>
+            </a:r>
+            <a:r>
+              <a:rPr sz="1600" b="0" i="0">
+                <a:solidFill>
+                  <a:srgbClr val="2B2B2B"/>
+                </a:solidFill>
+                <a:latin typeface="Calibri"/>
+              </a:rPr>
+              <a:t> · Escriba la pregunta en </a:t>
+            </a:r>
+            <a:r>
+              <a:rPr sz="1600" b="1" i="0">
+                <a:solidFill>
+                  <a:srgbClr val="2B2B2B"/>
+                </a:solidFill>
+                <a:latin typeface="Calibri"/>
+              </a:rPr>
+              <a:t>una sola frase</a:t>
+            </a:r>
+            <a:r>
+              <a:rPr sz="1600" b="0" i="0">
+                <a:solidFill>
+                  <a:srgbClr val="2B2B2B"/>
+                </a:solidFill>
+                <a:latin typeface="Calibri"/>
+              </a:rPr>
+              <a:t> investigable.</a:t>
+            </a:r>
+          </a:p>
+          <a:p>
+            <a:pPr>
+              <a:spcAft>
+                <a:spcPts val="1000"/>
+              </a:spcAft>
+            </a:pPr>
+            <a:r>
+              <a:rPr sz="1600" b="0" i="0">
+                <a:solidFill>
+                  <a:srgbClr val="2B2B2B"/>
+                </a:solidFill>
+                <a:latin typeface="Calibri"/>
+              </a:rPr>
+              <a:t>–   </a:t>
+            </a:r>
+            <a:r>
+              <a:rPr sz="1600" b="1" i="0">
+                <a:solidFill>
+                  <a:srgbClr val="2B2B2B"/>
+                </a:solidFill>
+                <a:latin typeface="Calibri"/>
+              </a:rPr>
+              <a:t>Paso 4</a:t>
+            </a:r>
+            <a:r>
+              <a:rPr sz="1600" b="0" i="0">
+                <a:solidFill>
+                  <a:srgbClr val="2B2B2B"/>
+                </a:solidFill>
+                <a:latin typeface="Calibri"/>
+              </a:rPr>
+              <a:t> · Busque en </a:t>
+            </a:r>
+            <a:r>
+              <a:rPr sz="1600" b="1" i="0">
+                <a:solidFill>
+                  <a:srgbClr val="2B2B2B"/>
+                </a:solidFill>
+                <a:latin typeface="Calibri"/>
+              </a:rPr>
+              <a:t>Google Académico</a:t>
+            </a:r>
+            <a:r>
+              <a:rPr sz="1600" b="0" i="0">
+                <a:solidFill>
+                  <a:srgbClr val="2B2B2B"/>
+                </a:solidFill>
+                <a:latin typeface="Calibri"/>
+              </a:rPr>
+              <a:t> y en </a:t>
+            </a:r>
+            <a:r>
+              <a:rPr sz="1600" b="1" i="0">
+                <a:solidFill>
+                  <a:srgbClr val="2B2B2B"/>
+                </a:solidFill>
+                <a:latin typeface="Calibri"/>
+              </a:rPr>
+              <a:t>SciELO o Redalyc</a:t>
+            </a:r>
+            <a:r>
+              <a:rPr sz="1600" b="0" i="0">
+                <a:solidFill>
+                  <a:srgbClr val="2B2B2B"/>
+                </a:solidFill>
+                <a:latin typeface="Calibri"/>
+              </a:rPr>
+              <a:t> y quédese con </a:t>
+            </a:r>
+            <a:r>
+              <a:rPr sz="1600" b="1" i="0">
+                <a:solidFill>
+                  <a:srgbClr val="2B2B2B"/>
+                </a:solidFill>
+                <a:latin typeface="Calibri"/>
+              </a:rPr>
+              <a:t>3 fuentes</a:t>
+            </a:r>
+            <a:r>
+              <a:rPr sz="1600" b="0" i="0">
+                <a:solidFill>
+                  <a:srgbClr val="2B2B2B"/>
+                </a:solidFill>
+                <a:latin typeface="Calibri"/>
+              </a:rPr>
+              <a:t> que pasen el filtro de 60 segundos.</a:t>
+            </a:r>
+          </a:p>
+          <a:p>
+            <a:pPr>
+              <a:spcAft>
+                <a:spcPts val="1000"/>
+              </a:spcAft>
+            </a:pPr>
+            <a:r>
+              <a:rPr sz="1600" b="0" i="0">
+                <a:solidFill>
+                  <a:srgbClr val="2B2B2B"/>
+                </a:solidFill>
+                <a:latin typeface="Calibri"/>
+              </a:rPr>
+              <a:t>–   </a:t>
+            </a:r>
+            <a:r>
+              <a:rPr sz="1600" b="1" i="0">
+                <a:solidFill>
+                  <a:srgbClr val="2B2B2B"/>
+                </a:solidFill>
+                <a:latin typeface="Calibri"/>
+              </a:rPr>
+              <a:t>Paso 5</a:t>
+            </a:r>
+            <a:r>
+              <a:rPr sz="1600" b="0" i="0">
+                <a:solidFill>
+                  <a:srgbClr val="2B2B2B"/>
+                </a:solidFill>
+                <a:latin typeface="Calibri"/>
+              </a:rPr>
+              <a:t> · Genere las </a:t>
+            </a:r>
+            <a:r>
+              <a:rPr sz="1600" b="1" i="0">
+                <a:solidFill>
+                  <a:srgbClr val="2B2B2B"/>
+                </a:solidFill>
+                <a:latin typeface="Calibri"/>
+              </a:rPr>
+              <a:t>3 referencias en APA 7</a:t>
+            </a:r>
+            <a:r>
+              <a:rPr sz="1600" b="0" i="0">
+                <a:solidFill>
+                  <a:srgbClr val="2B2B2B"/>
+                </a:solidFill>
+                <a:latin typeface="Calibri"/>
+              </a:rPr>
+              <a:t> con </a:t>
+            </a:r>
+            <a:r>
+              <a:rPr sz="1600" b="1" i="0">
+                <a:solidFill>
+                  <a:srgbClr val="2B2B2B"/>
+                </a:solidFill>
+                <a:latin typeface="Calibri"/>
+              </a:rPr>
+              <a:t>ZoteroBib</a:t>
+            </a:r>
+            <a:r>
+              <a:rPr sz="1600" b="0" i="0">
+                <a:solidFill>
+                  <a:srgbClr val="2B2B2B"/>
+                </a:solidFill>
+                <a:latin typeface="Calibri"/>
+              </a:rPr>
+              <a:t>, revíselas a mano y péguelas bajo *Referencias*.</a:t>
+            </a:r>
+          </a:p>
+          <a:p>
+            <a:pPr>
+              <a:spcAft>
+                <a:spcPts val="1000"/>
+              </a:spcAft>
+            </a:pPr>
+            <a:r>
+              <a:rPr sz="1600" b="0" i="0">
+                <a:solidFill>
+                  <a:srgbClr val="2B2B2B"/>
+                </a:solidFill>
+                <a:latin typeface="Calibri"/>
+              </a:rPr>
+              <a:t>–   </a:t>
+            </a:r>
+            <a:r>
+              <a:rPr sz="1600" b="1" i="0">
+                <a:solidFill>
+                  <a:srgbClr val="2B2B2B"/>
+                </a:solidFill>
+                <a:latin typeface="Calibri"/>
+              </a:rPr>
+              <a:t>En clase, sin falta:</a:t>
+            </a:r>
+            <a:r>
+              <a:rPr sz="1600" b="0" i="0">
+                <a:solidFill>
+                  <a:srgbClr val="2B2B2B"/>
+                </a:solidFill>
+                <a:latin typeface="Calibri"/>
+              </a:rPr>
+              <a:t> los </a:t>
+            </a:r>
+            <a:r>
+              <a:rPr sz="1600" b="1" i="0">
+                <a:solidFill>
+                  <a:srgbClr val="2B2B2B"/>
+                </a:solidFill>
+                <a:latin typeface="Calibri"/>
+              </a:rPr>
+              <a:t>pasos 1 a 3</a:t>
+            </a:r>
+            <a:r>
+              <a:rPr sz="1600" b="0" i="0">
+                <a:solidFill>
+                  <a:srgbClr val="2B2B2B"/>
+                </a:solidFill>
+                <a:latin typeface="Calibri"/>
+              </a:rPr>
+              <a:t>. Del 4 en adelante puede quedar en trabajo autónomo, pero antes de la próxima sesión.</a:t>
+            </a:r>
+          </a:p>
+        </p:txBody>
+      </p:sp>
+      <p:sp>
+        <p:nvSpPr>
+          <p:cNvPr id="6" name="TextBox 5"/>
           <p:cNvSpPr txBox="1"/>
           <p:nvPr/>
         </p:nvSpPr>
@@ -12504,7 +12392,7 @@
       </p:sp>
       <p:sp>
         <p:nvSpPr>
-          <p:cNvPr id="6" name="TextBox 5"/>
+          <p:cNvPr id="7" name="TextBox 6"/>
           <p:cNvSpPr txBox="1"/>
           <p:nvPr/>
         </p:nvSpPr>
@@ -12654,7 +12542,7 @@
                 </a:solidFill>
                 <a:latin typeface="Calibri"/>
               </a:rPr>
-              <a:t>Checklist antes de subir su entrega</a:t>
+              <a:t>TALLER · cómo se revisa y dónde se entrega</a:t>
             </a:r>
           </a:p>
         </p:txBody>
@@ -12667,8 +12555,8 @@
         </p:nvSpPr>
         <p:spPr>
           <a:xfrm>
-            <a:off x="640080" y="1691639"/>
-            <a:ext cx="10911535" cy="4617720"/>
+            <a:off x="640080" y="1280160"/>
+            <a:ext cx="10911535" cy="411480"/>
           </a:xfrm>
           <a:prstGeom prst="rect">
             <a:avLst/>
@@ -12681,6 +12569,41 @@
           </a:bodyPr>
           <a:lstStyle/>
           <a:p>
+            <a:pPr algn="ctr"/>
+            <a:r>
+              <a:rPr sz="1500" b="0" i="0">
+                <a:solidFill>
+                  <a:srgbClr val="2B2B2B"/>
+                </a:solidFill>
+                <a:latin typeface="Calibri"/>
+              </a:rPr>
+              <a:t>Pregunta + tres fuentes citadas</a:t>
+            </a:r>
+          </a:p>
+        </p:txBody>
+      </p:sp>
+      <p:sp>
+        <p:nvSpPr>
+          <p:cNvPr id="5" name="TextBox 4"/>
+          <p:cNvSpPr txBox="1"/>
+          <p:nvPr/>
+        </p:nvSpPr>
+        <p:spPr>
+          <a:xfrm>
+            <a:off x="640080" y="2011679"/>
+            <a:ext cx="10911535" cy="4297680"/>
+          </a:xfrm>
+          <a:prstGeom prst="rect">
+            <a:avLst/>
+          </a:prstGeom>
+          <a:noFill/>
+        </p:spPr>
+        <p:txBody>
+          <a:bodyPr wrap="square" anchor="t" lIns="0" rIns="0" tIns="0" bIns="0">
+            <a:spAutoFit/>
+          </a:bodyPr>
+          <a:lstStyle/>
+          <a:p>
             <a:pPr>
               <a:spcAft>
                 <a:spcPts val="1000"/>
@@ -12693,7 +12616,197 @@
                 </a:solidFill>
                 <a:latin typeface="Calibri"/>
               </a:rPr>
-              <a:t>–   [ ] El documento se llama `S04_ProblemaPreguntaFuentes_Apellido` y trae la imagen del diagrama pegada.</a:t>
+              <a:t>–   </a:t>
+            </a:r>
+            <a:r>
+              <a:rPr sz="1600" b="1" i="0">
+                <a:solidFill>
+                  <a:srgbClr val="2B2B2B"/>
+                </a:solidFill>
+                <a:latin typeface="Calibri"/>
+              </a:rPr>
+              <a:t>Quedó bien si</a:t>
+            </a:r>
+            <a:r>
+              <a:rPr sz="1600" b="0" i="0">
+                <a:solidFill>
+                  <a:srgbClr val="2B2B2B"/>
+                </a:solidFill>
+                <a:latin typeface="Calibri"/>
+              </a:rPr>
+              <a:t> —compruébelo usted antes de cerrar el documento—:</a:t>
+            </a:r>
+          </a:p>
+          <a:p>
+            <a:pPr lvl="1">
+              <a:spcAft>
+                <a:spcPts val="600"/>
+              </a:spcAft>
+            </a:pPr>
+            <a:r>
+              <a:rPr sz="1500" b="0" i="0">
+                <a:solidFill>
+                  <a:srgbClr val="2B2B2B"/>
+                </a:solidFill>
+                <a:latin typeface="Calibri"/>
+              </a:rPr>
+              <a:t>●   Su pregunta </a:t>
+            </a:r>
+            <a:r>
+              <a:rPr sz="1500" b="1" i="0">
+                <a:solidFill>
+                  <a:srgbClr val="2B2B2B"/>
+                </a:solidFill>
+                <a:latin typeface="Calibri"/>
+              </a:rPr>
+              <a:t>tiene actor y contexto</a:t>
+            </a:r>
+            <a:r>
+              <a:rPr sz="1500" b="0" i="0">
+                <a:solidFill>
+                  <a:srgbClr val="2B2B2B"/>
+                </a:solidFill>
+                <a:latin typeface="Calibri"/>
+              </a:rPr>
+              <a:t> y </a:t>
+            </a:r>
+            <a:r>
+              <a:rPr sz="1500" b="1" i="0">
+                <a:solidFill>
+                  <a:srgbClr val="2B2B2B"/>
+                </a:solidFill>
+                <a:latin typeface="Calibri"/>
+              </a:rPr>
+              <a:t>no</a:t>
+            </a:r>
+            <a:r>
+              <a:rPr sz="1500" b="0" i="0">
+                <a:solidFill>
+                  <a:srgbClr val="2B2B2B"/>
+                </a:solidFill>
+                <a:latin typeface="Calibri"/>
+              </a:rPr>
+              <a:t> se responde con sí/no.</a:t>
+            </a:r>
+          </a:p>
+          <a:p>
+            <a:pPr lvl="1">
+              <a:spcAft>
+                <a:spcPts val="600"/>
+              </a:spcAft>
+            </a:pPr>
+            <a:r>
+              <a:rPr sz="1500" b="0" i="0">
+                <a:solidFill>
+                  <a:srgbClr val="2B2B2B"/>
+                </a:solidFill>
+                <a:latin typeface="Calibri"/>
+              </a:rPr>
+              <a:t>●   El diagrama muestra </a:t>
+            </a:r>
+            <a:r>
+              <a:rPr sz="1500" b="1" i="0">
+                <a:solidFill>
+                  <a:srgbClr val="2B2B2B"/>
+                </a:solidFill>
+                <a:latin typeface="Calibri"/>
+              </a:rPr>
+              <a:t>al menos tres causas</a:t>
+            </a:r>
+            <a:r>
+              <a:rPr sz="1500" b="0" i="0">
+                <a:solidFill>
+                  <a:srgbClr val="2B2B2B"/>
+                </a:solidFill>
+                <a:latin typeface="Calibri"/>
+              </a:rPr>
+              <a:t> en familias distintas.</a:t>
+            </a:r>
+          </a:p>
+          <a:p>
+            <a:pPr lvl="1">
+              <a:spcAft>
+                <a:spcPts val="600"/>
+              </a:spcAft>
+            </a:pPr>
+            <a:r>
+              <a:rPr sz="1500" b="0" i="0">
+                <a:solidFill>
+                  <a:srgbClr val="2B2B2B"/>
+                </a:solidFill>
+                <a:latin typeface="Calibri"/>
+              </a:rPr>
+              <a:t>●   Las </a:t>
+            </a:r>
+            <a:r>
+              <a:rPr sz="1500" b="1" i="0">
+                <a:solidFill>
+                  <a:srgbClr val="2B2B2B"/>
+                </a:solidFill>
+                <a:latin typeface="Calibri"/>
+              </a:rPr>
+              <a:t>3 referencias</a:t>
+            </a:r>
+            <a:r>
+              <a:rPr sz="1500" b="0" i="0">
+                <a:solidFill>
+                  <a:srgbClr val="2B2B2B"/>
+                </a:solidFill>
+                <a:latin typeface="Calibri"/>
+              </a:rPr>
+              <a:t> están completas —autor, año, título, fuente— y usted </a:t>
+            </a:r>
+            <a:r>
+              <a:rPr sz="1500" b="1" i="0">
+                <a:solidFill>
+                  <a:srgbClr val="2B2B2B"/>
+                </a:solidFill>
+                <a:latin typeface="Calibri"/>
+              </a:rPr>
+              <a:t>abrió las tres</a:t>
+            </a:r>
+            <a:r>
+              <a:rPr sz="1500" b="0" i="0">
+                <a:solidFill>
+                  <a:srgbClr val="2B2B2B"/>
+                </a:solidFill>
+                <a:latin typeface="Calibri"/>
+              </a:rPr>
+              <a:t>.</a:t>
+            </a:r>
+          </a:p>
+          <a:p>
+            <a:pPr lvl="1">
+              <a:spcAft>
+                <a:spcPts val="600"/>
+              </a:spcAft>
+            </a:pPr>
+            <a:r>
+              <a:rPr sz="1500" b="0" i="0">
+                <a:solidFill>
+                  <a:srgbClr val="2B2B2B"/>
+                </a:solidFill>
+                <a:latin typeface="Calibri"/>
+              </a:rPr>
+              <a:t>●   Leyó su pregunta a un compañero y </a:t>
+            </a:r>
+            <a:r>
+              <a:rPr sz="1500" b="1" i="0">
+                <a:solidFill>
+                  <a:srgbClr val="2B2B2B"/>
+                </a:solidFill>
+                <a:latin typeface="Calibri"/>
+              </a:rPr>
+              <a:t>no tuvo que explicársela</a:t>
+            </a:r>
+            <a:r>
+              <a:rPr sz="1500" b="0" i="0">
+                <a:solidFill>
+                  <a:srgbClr val="2B2B2B"/>
+                </a:solidFill>
+                <a:latin typeface="Calibri"/>
+              </a:rPr>
+              <a:t>.</a:t>
             </a:r>
           </a:p>
           <a:p>
@@ -12709,7 +12822,7 @@
                 </a:solidFill>
                 <a:latin typeface="Calibri"/>
               </a:rPr>
-              <a:t>–   [ ] Mi problema está escrito como </a:t>
+              <a:t>–   </a:t>
             </a:r>
             <a:r>
               <a:rPr sz="1600" b="1" i="0">
@@ -12718,34 +12831,16 @@
                 </a:solidFill>
                 <a:latin typeface="Calibri"/>
               </a:rPr>
-              <a:t>hecho + consecuencias</a:t>
-            </a:r>
-            <a:r>
-              <a:rPr sz="1600" b="0" i="0">
-                <a:solidFill>
-                  <a:srgbClr val="2B2B2B"/>
-                </a:solidFill>
-                <a:latin typeface="Calibri"/>
-              </a:rPr>
-              <a:t>, no como "falta un/una...", y no aparece </a:t>
-            </a:r>
-            <a:r>
-              <a:rPr sz="1600" b="1" i="0">
-                <a:solidFill>
-                  <a:srgbClr val="2B2B2B"/>
-                </a:solidFill>
-                <a:latin typeface="Calibri"/>
-              </a:rPr>
-              <a:t>mi solución</a:t>
-            </a:r>
-            <a:r>
-              <a:rPr sz="1600" b="0" i="0">
-                <a:solidFill>
-                  <a:srgbClr val="2B2B2B"/>
-                </a:solidFill>
-                <a:latin typeface="Calibri"/>
-              </a:rPr>
-              <a:t> por ningún lado.</a:t>
+              <a:t>Plan B:</a:t>
+            </a:r>
+            <a:r>
+              <a:rPr sz="1600" b="0" i="0">
+                <a:solidFill>
+                  <a:srgbClr val="2B2B2B"/>
+                </a:solidFill>
+                <a:latin typeface="Calibri"/>
+              </a:rPr>
+              <a:t> Si el problema no arranca escrito, dibuje el diagrama primero y ponga en palabras cada rama: el texto sale de ahí.</a:t>
             </a:r>
           </a:p>
           <a:p>
@@ -12761,7 +12856,7 @@
                 </a:solidFill>
                 <a:latin typeface="Calibri"/>
               </a:rPr>
-              <a:t>–   [ ] Nombro a los </a:t>
+              <a:t>–   </a:t>
             </a:r>
             <a:r>
               <a:rPr sz="1600" b="1" i="0">
@@ -12770,16 +12865,34 @@
                 </a:solidFill>
                 <a:latin typeface="Calibri"/>
               </a:rPr>
-              <a:t>afectados</a:t>
-            </a:r>
-            <a:r>
-              <a:rPr sz="1600" b="0" i="0">
-                <a:solidFill>
-                  <a:srgbClr val="2B2B2B"/>
-                </a:solidFill>
-                <a:latin typeface="Calibri"/>
-              </a:rPr>
-              <a:t>: quién pierde qué.</a:t>
+              <a:t>Hoy no se sube nada al aula:</a:t>
+            </a:r>
+            <a:r>
+              <a:rPr sz="1600" b="0" i="0">
+                <a:solidFill>
+                  <a:srgbClr val="2B2B2B"/>
+                </a:solidFill>
+                <a:latin typeface="Calibri"/>
+              </a:rPr>
+              <a:t> guarde `S04_ProblemaPreguntaFuentes_Apellido` (Google Doc o PDF) en su Drive y tráigalo a la próxima sesión. Es un </a:t>
+            </a:r>
+            <a:r>
+              <a:rPr sz="1600" b="1" i="0">
+                <a:solidFill>
+                  <a:srgbClr val="2B2B2B"/>
+                </a:solidFill>
+                <a:latin typeface="Calibri"/>
+              </a:rPr>
+              <a:t>avance formativo</a:t>
+            </a:r>
+            <a:r>
+              <a:rPr sz="1600" b="0" i="0">
+                <a:solidFill>
+                  <a:srgbClr val="2B2B2B"/>
+                </a:solidFill>
+                <a:latin typeface="Calibri"/>
+              </a:rPr>
+              <a:t>, se revisa en clase.</a:t>
             </a:r>
           </a:p>
           <a:p>
@@ -12795,7 +12908,7 @@
                 </a:solidFill>
                 <a:latin typeface="Calibri"/>
               </a:rPr>
-              <a:t>–   [ ] Mi diagrama tiene </a:t>
+              <a:t>–   </a:t>
             </a:r>
             <a:r>
               <a:rPr sz="1600" b="1" i="0">
@@ -12804,32 +12917,16 @@
                 </a:solidFill>
                 <a:latin typeface="Calibri"/>
               </a:rPr>
-              <a:t>al menos tres familias de causas</a:t>
-            </a:r>
-            <a:r>
-              <a:rPr sz="1600" b="0" i="0">
-                <a:solidFill>
-                  <a:srgbClr val="2B2B2B"/>
-                </a:solidFill>
-                <a:latin typeface="Calibri"/>
-              </a:rPr>
-              <a:t> con contenido real, y distinguí causas de efectos.</a:t>
-            </a:r>
-          </a:p>
-          <a:p>
-            <a:pPr>
-              <a:spcAft>
-                <a:spcPts val="1000"/>
-              </a:spcAft>
-            </a:pPr>
-            <a:r>
-              <a:rPr sz="1600" b="0" i="0">
-                <a:solidFill>
-                  <a:srgbClr val="2B2B2B"/>
-                </a:solidFill>
-                <a:latin typeface="Calibri"/>
-              </a:rPr>
-              <a:t>–   [ ] Mi pregunta empieza por </a:t>
+              <a:t>Esto alimenta:</a:t>
+            </a:r>
+            <a:r>
+              <a:rPr sz="1600" b="0" i="0">
+                <a:solidFill>
+                  <a:srgbClr val="2B2B2B"/>
+                </a:solidFill>
+                <a:latin typeface="Calibri"/>
+              </a:rPr>
+              <a:t> </a:t>
             </a:r>
             <a:r>
               <a:rPr sz="1600" b="1" i="0">
@@ -12838,16 +12935,16 @@
                 </a:solidFill>
                 <a:latin typeface="Calibri"/>
               </a:rPr>
-              <a:t>cómo, qué, cuál o en qué medida</a:t>
-            </a:r>
-            <a:r>
-              <a:rPr sz="1600" b="0" i="0">
-                <a:solidFill>
-                  <a:srgbClr val="2B2B2B"/>
-                </a:solidFill>
-                <a:latin typeface="Calibri"/>
-              </a:rPr>
-              <a:t>, tiene </a:t>
+              <a:t>ACA Final</a:t>
+            </a:r>
+            <a:r>
+              <a:rPr sz="1600" b="0" i="0">
+                <a:solidFill>
+                  <a:srgbClr val="2B2B2B"/>
+                </a:solidFill>
+                <a:latin typeface="Calibri"/>
+              </a:rPr>
+              <a:t> —tarea, 32,8%—, el documento que </a:t>
             </a:r>
             <a:r>
               <a:rPr sz="1600" b="1" i="0">
@@ -12856,16 +12953,16 @@
                 </a:solidFill>
                 <a:latin typeface="Calibri"/>
               </a:rPr>
-              <a:t>actor</a:t>
-            </a:r>
-            <a:r>
-              <a:rPr sz="1600" b="0" i="0">
-                <a:solidFill>
-                  <a:srgbClr val="2B2B2B"/>
-                </a:solidFill>
-                <a:latin typeface="Calibri"/>
-              </a:rPr>
-              <a:t> y </a:t>
+              <a:t>sí</a:t>
+            </a:r>
+            <a:r>
+              <a:rPr sz="1600" b="0" i="0">
+                <a:solidFill>
+                  <a:srgbClr val="2B2B2B"/>
+                </a:solidFill>
+                <a:latin typeface="Calibri"/>
+              </a:rPr>
+              <a:t> recibe </a:t>
             </a:r>
             <a:r>
               <a:rPr sz="1600" b="1" i="0">
@@ -12874,32 +12971,16 @@
                 </a:solidFill>
                 <a:latin typeface="Calibri"/>
               </a:rPr>
-              <a:t>contexto</a:t>
-            </a:r>
-            <a:r>
-              <a:rPr sz="1600" b="0" i="0">
-                <a:solidFill>
-                  <a:srgbClr val="2B2B2B"/>
-                </a:solidFill>
-                <a:latin typeface="Calibri"/>
-              </a:rPr>
-              <a:t>, y cabe en una sola frase.</a:t>
-            </a:r>
-          </a:p>
-          <a:p>
-            <a:pPr>
-              <a:spcAft>
-                <a:spcPts val="1000"/>
-              </a:spcAft>
-            </a:pPr>
-            <a:r>
-              <a:rPr sz="1600" b="0" i="0">
-                <a:solidFill>
-                  <a:srgbClr val="2B2B2B"/>
-                </a:solidFill>
-                <a:latin typeface="Calibri"/>
-              </a:rPr>
-              <a:t>–   [ ] Mi pregunta es coherente con el </a:t>
+              <a:t>CDigital</a:t>
+            </a:r>
+            <a:r>
+              <a:rPr sz="1600" b="0" i="0">
+                <a:solidFill>
+                  <a:srgbClr val="2B2B2B"/>
+                </a:solidFill>
+                <a:latin typeface="Calibri"/>
+              </a:rPr>
+              <a:t>; cierra en la semana de la </a:t>
             </a:r>
             <a:r>
               <a:rPr sz="1600" b="1" i="0">
@@ -12908,143 +12989,23 @@
                 </a:solidFill>
                 <a:latin typeface="Calibri"/>
               </a:rPr>
-              <a:t>tema y la línea</a:t>
-            </a:r>
-            <a:r>
-              <a:rPr sz="1600" b="0" i="0">
-                <a:solidFill>
-                  <a:srgbClr val="2B2B2B"/>
-                </a:solidFill>
-                <a:latin typeface="Calibri"/>
-              </a:rPr>
-              <a:t> que ya elegí.</a:t>
-            </a:r>
-          </a:p>
-          <a:p>
-            <a:pPr>
-              <a:spcAft>
-                <a:spcPts val="1000"/>
-              </a:spcAft>
-            </a:pPr>
-            <a:r>
-              <a:rPr sz="1600" b="0" i="0">
-                <a:solidFill>
-                  <a:srgbClr val="2B2B2B"/>
-                </a:solidFill>
-                <a:latin typeface="Calibri"/>
-              </a:rPr>
-              <a:t>–   [ ] Tengo </a:t>
-            </a:r>
-            <a:r>
-              <a:rPr sz="1600" b="1" i="0">
-                <a:solidFill>
-                  <a:srgbClr val="2B2B2B"/>
-                </a:solidFill>
-                <a:latin typeface="Calibri"/>
-              </a:rPr>
-              <a:t>3 fuentes</a:t>
-            </a:r>
-            <a:r>
-              <a:rPr sz="1600" b="0" i="0">
-                <a:solidFill>
-                  <a:srgbClr val="2B2B2B"/>
-                </a:solidFill>
-                <a:latin typeface="Calibri"/>
-              </a:rPr>
-              <a:t> y </a:t>
-            </a:r>
-            <a:r>
-              <a:rPr sz="1600" b="1" i="0">
-                <a:solidFill>
-                  <a:srgbClr val="2B2B2B"/>
-                </a:solidFill>
-                <a:latin typeface="Calibri"/>
-              </a:rPr>
-              <a:t>abrí las tres</a:t>
-            </a:r>
-            <a:r>
-              <a:rPr sz="1600" b="0" i="0">
-                <a:solidFill>
-                  <a:srgbClr val="2B2B2B"/>
-                </a:solidFill>
-                <a:latin typeface="Calibri"/>
-              </a:rPr>
-              <a:t>: ninguna salió solo del listado de resultados.</a:t>
-            </a:r>
-          </a:p>
-          <a:p>
-            <a:pPr>
-              <a:spcAft>
-                <a:spcPts val="1000"/>
-              </a:spcAft>
-            </a:pPr>
-            <a:r>
-              <a:rPr sz="1600" b="0" i="0">
-                <a:solidFill>
-                  <a:srgbClr val="2B2B2B"/>
-                </a:solidFill>
-                <a:latin typeface="Calibri"/>
-              </a:rPr>
-              <a:t>–   [ ] Ninguna de mis fuentes es un blog, un video o Wikipedia; </a:t>
-            </a:r>
-            <a:r>
-              <a:rPr sz="1600" b="1" i="0">
-                <a:solidFill>
-                  <a:srgbClr val="2B2B2B"/>
-                </a:solidFill>
-                <a:latin typeface="Calibri"/>
-              </a:rPr>
-              <a:t>al menos una</a:t>
-            </a:r>
-            <a:r>
-              <a:rPr sz="1600" b="0" i="0">
-                <a:solidFill>
-                  <a:srgbClr val="2B2B2B"/>
-                </a:solidFill>
-                <a:latin typeface="Calibri"/>
-              </a:rPr>
-              <a:t> es de SciELO o Redalyc.</a:t>
-            </a:r>
-          </a:p>
-          <a:p>
-            <a:pPr>
-              <a:spcAft>
-                <a:spcPts val="1000"/>
-              </a:spcAft>
-            </a:pPr>
-            <a:r>
-              <a:rPr sz="1600" b="0" i="0">
-                <a:solidFill>
-                  <a:srgbClr val="2B2B2B"/>
-                </a:solidFill>
-                <a:latin typeface="Calibri"/>
-              </a:rPr>
-              <a:t>–   [ ] Mis </a:t>
-            </a:r>
-            <a:r>
-              <a:rPr sz="1600" b="1" i="0">
-                <a:solidFill>
-                  <a:srgbClr val="2B2B2B"/>
-                </a:solidFill>
-                <a:latin typeface="Calibri"/>
-              </a:rPr>
-              <a:t>3 referencias en APA 7</a:t>
-            </a:r>
-            <a:r>
-              <a:rPr sz="1600" b="0" i="0">
-                <a:solidFill>
-                  <a:srgbClr val="2B2B2B"/>
-                </a:solidFill>
-                <a:latin typeface="Calibri"/>
-              </a:rPr>
-              <a:t> están revisadas a mano (autores, año, revista, mayúsculas, DOI).</a:t>
-            </a:r>
-          </a:p>
-        </p:txBody>
-      </p:sp>
-      <p:sp>
-        <p:nvSpPr>
-          <p:cNvPr id="5" name="TextBox 4"/>
+              <a:t>Sesión 05</a:t>
+            </a:r>
+            <a:r>
+              <a:rPr sz="1600" b="0" i="0">
+                <a:solidFill>
+                  <a:srgbClr val="2B2B2B"/>
+                </a:solidFill>
+                <a:latin typeface="Calibri"/>
+              </a:rPr>
+              <a:t>.</a:t>
+            </a:r>
+          </a:p>
+        </p:txBody>
+      </p:sp>
+      <p:sp>
+        <p:nvSpPr>
+          <p:cNvPr id="6" name="TextBox 5"/>
           <p:cNvSpPr txBox="1"/>
           <p:nvPr/>
         </p:nvSpPr>
@@ -13177,7 +13138,7 @@
                 </a:solidFill>
                 <a:latin typeface="Calibri"/>
               </a:rPr>
-              <a:t>Checklist antes de subir su entrega (cont.)</a:t>
+              <a:t>Checklist antes de subir su entrega</a:t>
             </a:r>
           </a:p>
         </p:txBody>
@@ -13216,25 +13177,7 @@
                 </a:solidFill>
                 <a:latin typeface="Calibri"/>
               </a:rPr>
-              <a:t>–   [ ] Anoté, al lado de cada fuente, </a:t>
-            </a:r>
-            <a:r>
-              <a:rPr sz="1600" b="1" i="0">
-                <a:solidFill>
-                  <a:srgbClr val="2B2B2B"/>
-                </a:solidFill>
-                <a:latin typeface="Calibri"/>
-              </a:rPr>
-              <a:t>una línea</a:t>
-            </a:r>
-            <a:r>
-              <a:rPr sz="1600" b="0" i="0">
-                <a:solidFill>
-                  <a:srgbClr val="2B2B2B"/>
-                </a:solidFill>
-                <a:latin typeface="Calibri"/>
-              </a:rPr>
-              <a:t> que diga por qué se relaciona con mi pregunta.</a:t>
+              <a:t>–   [ ] El documento se llama `S04_ProblemaPreguntaFuentes_Apellido` y trae la imagen del diagrama pegada.</a:t>
             </a:r>
           </a:p>
           <a:p>
@@ -13250,7 +13193,7 @@
                 </a:solidFill>
                 <a:latin typeface="Calibri"/>
               </a:rPr>
-              <a:t>–   [ ] Subí el archivo a </a:t>
+              <a:t>–   [ ] Mi problema está escrito como </a:t>
             </a:r>
             <a:r>
               <a:rPr sz="1600" b="1" i="0">
@@ -13259,16 +13202,326 @@
                 </a:solidFill>
                 <a:latin typeface="Calibri"/>
               </a:rPr>
-              <a:t>CDigital</a:t>
-            </a:r>
-            <a:r>
-              <a:rPr sz="1600" b="0" i="0">
-                <a:solidFill>
-                  <a:srgbClr val="2B2B2B"/>
-                </a:solidFill>
-                <a:latin typeface="Calibri"/>
-              </a:rPr>
-              <a:t>: [URL CDigital — campus del curso pendiente]</a:t>
+              <a:t>hecho + consecuencias</a:t>
+            </a:r>
+            <a:r>
+              <a:rPr sz="1600" b="0" i="0">
+                <a:solidFill>
+                  <a:srgbClr val="2B2B2B"/>
+                </a:solidFill>
+                <a:latin typeface="Calibri"/>
+              </a:rPr>
+              <a:t>, no como "falta un/una...", y no aparece </a:t>
+            </a:r>
+            <a:r>
+              <a:rPr sz="1600" b="1" i="0">
+                <a:solidFill>
+                  <a:srgbClr val="2B2B2B"/>
+                </a:solidFill>
+                <a:latin typeface="Calibri"/>
+              </a:rPr>
+              <a:t>mi solución</a:t>
+            </a:r>
+            <a:r>
+              <a:rPr sz="1600" b="0" i="0">
+                <a:solidFill>
+                  <a:srgbClr val="2B2B2B"/>
+                </a:solidFill>
+                <a:latin typeface="Calibri"/>
+              </a:rPr>
+              <a:t> por ningún lado.</a:t>
+            </a:r>
+          </a:p>
+          <a:p>
+            <a:pPr>
+              <a:spcAft>
+                <a:spcPts val="1000"/>
+              </a:spcAft>
+            </a:pPr>
+            <a:r>
+              <a:rPr sz="1600" b="0" i="0">
+                <a:solidFill>
+                  <a:srgbClr val="2B2B2B"/>
+                </a:solidFill>
+                <a:latin typeface="Calibri"/>
+              </a:rPr>
+              <a:t>–   [ ] Nombro a los </a:t>
+            </a:r>
+            <a:r>
+              <a:rPr sz="1600" b="1" i="0">
+                <a:solidFill>
+                  <a:srgbClr val="2B2B2B"/>
+                </a:solidFill>
+                <a:latin typeface="Calibri"/>
+              </a:rPr>
+              <a:t>afectados</a:t>
+            </a:r>
+            <a:r>
+              <a:rPr sz="1600" b="0" i="0">
+                <a:solidFill>
+                  <a:srgbClr val="2B2B2B"/>
+                </a:solidFill>
+                <a:latin typeface="Calibri"/>
+              </a:rPr>
+              <a:t>: quién pierde qué.</a:t>
+            </a:r>
+          </a:p>
+          <a:p>
+            <a:pPr>
+              <a:spcAft>
+                <a:spcPts val="1000"/>
+              </a:spcAft>
+            </a:pPr>
+            <a:r>
+              <a:rPr sz="1600" b="0" i="0">
+                <a:solidFill>
+                  <a:srgbClr val="2B2B2B"/>
+                </a:solidFill>
+                <a:latin typeface="Calibri"/>
+              </a:rPr>
+              <a:t>–   [ ] Mi diagrama tiene </a:t>
+            </a:r>
+            <a:r>
+              <a:rPr sz="1600" b="1" i="0">
+                <a:solidFill>
+                  <a:srgbClr val="2B2B2B"/>
+                </a:solidFill>
+                <a:latin typeface="Calibri"/>
+              </a:rPr>
+              <a:t>al menos tres familias de causas</a:t>
+            </a:r>
+            <a:r>
+              <a:rPr sz="1600" b="0" i="0">
+                <a:solidFill>
+                  <a:srgbClr val="2B2B2B"/>
+                </a:solidFill>
+                <a:latin typeface="Calibri"/>
+              </a:rPr>
+              <a:t> con contenido real, y distinguí causas de efectos.</a:t>
+            </a:r>
+          </a:p>
+          <a:p>
+            <a:pPr>
+              <a:spcAft>
+                <a:spcPts val="1000"/>
+              </a:spcAft>
+            </a:pPr>
+            <a:r>
+              <a:rPr sz="1600" b="0" i="0">
+                <a:solidFill>
+                  <a:srgbClr val="2B2B2B"/>
+                </a:solidFill>
+                <a:latin typeface="Calibri"/>
+              </a:rPr>
+              <a:t>–   [ ] Mi pregunta empieza por </a:t>
+            </a:r>
+            <a:r>
+              <a:rPr sz="1600" b="1" i="0">
+                <a:solidFill>
+                  <a:srgbClr val="2B2B2B"/>
+                </a:solidFill>
+                <a:latin typeface="Calibri"/>
+              </a:rPr>
+              <a:t>cómo, qué, cuál o en qué medida</a:t>
+            </a:r>
+            <a:r>
+              <a:rPr sz="1600" b="0" i="0">
+                <a:solidFill>
+                  <a:srgbClr val="2B2B2B"/>
+                </a:solidFill>
+                <a:latin typeface="Calibri"/>
+              </a:rPr>
+              <a:t>, tiene </a:t>
+            </a:r>
+            <a:r>
+              <a:rPr sz="1600" b="1" i="0">
+                <a:solidFill>
+                  <a:srgbClr val="2B2B2B"/>
+                </a:solidFill>
+                <a:latin typeface="Calibri"/>
+              </a:rPr>
+              <a:t>actor</a:t>
+            </a:r>
+            <a:r>
+              <a:rPr sz="1600" b="0" i="0">
+                <a:solidFill>
+                  <a:srgbClr val="2B2B2B"/>
+                </a:solidFill>
+                <a:latin typeface="Calibri"/>
+              </a:rPr>
+              <a:t> y </a:t>
+            </a:r>
+            <a:r>
+              <a:rPr sz="1600" b="1" i="0">
+                <a:solidFill>
+                  <a:srgbClr val="2B2B2B"/>
+                </a:solidFill>
+                <a:latin typeface="Calibri"/>
+              </a:rPr>
+              <a:t>contexto</a:t>
+            </a:r>
+            <a:r>
+              <a:rPr sz="1600" b="0" i="0">
+                <a:solidFill>
+                  <a:srgbClr val="2B2B2B"/>
+                </a:solidFill>
+                <a:latin typeface="Calibri"/>
+              </a:rPr>
+              <a:t>, y cabe en una sola frase.</a:t>
+            </a:r>
+          </a:p>
+          <a:p>
+            <a:pPr>
+              <a:spcAft>
+                <a:spcPts val="1000"/>
+              </a:spcAft>
+            </a:pPr>
+            <a:r>
+              <a:rPr sz="1600" b="0" i="0">
+                <a:solidFill>
+                  <a:srgbClr val="2B2B2B"/>
+                </a:solidFill>
+                <a:latin typeface="Calibri"/>
+              </a:rPr>
+              <a:t>–   [ ] Mi pregunta es coherente con el </a:t>
+            </a:r>
+            <a:r>
+              <a:rPr sz="1600" b="1" i="0">
+                <a:solidFill>
+                  <a:srgbClr val="2B2B2B"/>
+                </a:solidFill>
+                <a:latin typeface="Calibri"/>
+              </a:rPr>
+              <a:t>tema y la línea</a:t>
+            </a:r>
+            <a:r>
+              <a:rPr sz="1600" b="0" i="0">
+                <a:solidFill>
+                  <a:srgbClr val="2B2B2B"/>
+                </a:solidFill>
+                <a:latin typeface="Calibri"/>
+              </a:rPr>
+              <a:t> que ya elegí.</a:t>
+            </a:r>
+          </a:p>
+          <a:p>
+            <a:pPr>
+              <a:spcAft>
+                <a:spcPts val="1000"/>
+              </a:spcAft>
+            </a:pPr>
+            <a:r>
+              <a:rPr sz="1600" b="0" i="0">
+                <a:solidFill>
+                  <a:srgbClr val="2B2B2B"/>
+                </a:solidFill>
+                <a:latin typeface="Calibri"/>
+              </a:rPr>
+              <a:t>–   [ ] Tengo </a:t>
+            </a:r>
+            <a:r>
+              <a:rPr sz="1600" b="1" i="0">
+                <a:solidFill>
+                  <a:srgbClr val="2B2B2B"/>
+                </a:solidFill>
+                <a:latin typeface="Calibri"/>
+              </a:rPr>
+              <a:t>3 fuentes</a:t>
+            </a:r>
+            <a:r>
+              <a:rPr sz="1600" b="0" i="0">
+                <a:solidFill>
+                  <a:srgbClr val="2B2B2B"/>
+                </a:solidFill>
+                <a:latin typeface="Calibri"/>
+              </a:rPr>
+              <a:t> y </a:t>
+            </a:r>
+            <a:r>
+              <a:rPr sz="1600" b="1" i="0">
+                <a:solidFill>
+                  <a:srgbClr val="2B2B2B"/>
+                </a:solidFill>
+                <a:latin typeface="Calibri"/>
+              </a:rPr>
+              <a:t>abrí las tres</a:t>
+            </a:r>
+            <a:r>
+              <a:rPr sz="1600" b="0" i="0">
+                <a:solidFill>
+                  <a:srgbClr val="2B2B2B"/>
+                </a:solidFill>
+                <a:latin typeface="Calibri"/>
+              </a:rPr>
+              <a:t>: ninguna salió solo del listado de resultados.</a:t>
+            </a:r>
+          </a:p>
+          <a:p>
+            <a:pPr>
+              <a:spcAft>
+                <a:spcPts val="1000"/>
+              </a:spcAft>
+            </a:pPr>
+            <a:r>
+              <a:rPr sz="1600" b="0" i="0">
+                <a:solidFill>
+                  <a:srgbClr val="2B2B2B"/>
+                </a:solidFill>
+                <a:latin typeface="Calibri"/>
+              </a:rPr>
+              <a:t>–   [ ] Ninguna de mis fuentes es un blog, un video o Wikipedia; </a:t>
+            </a:r>
+            <a:r>
+              <a:rPr sz="1600" b="1" i="0">
+                <a:solidFill>
+                  <a:srgbClr val="2B2B2B"/>
+                </a:solidFill>
+                <a:latin typeface="Calibri"/>
+              </a:rPr>
+              <a:t>al menos una</a:t>
+            </a:r>
+            <a:r>
+              <a:rPr sz="1600" b="0" i="0">
+                <a:solidFill>
+                  <a:srgbClr val="2B2B2B"/>
+                </a:solidFill>
+                <a:latin typeface="Calibri"/>
+              </a:rPr>
+              <a:t> es de SciELO o Redalyc.</a:t>
+            </a:r>
+          </a:p>
+          <a:p>
+            <a:pPr>
+              <a:spcAft>
+                <a:spcPts val="1000"/>
+              </a:spcAft>
+            </a:pPr>
+            <a:r>
+              <a:rPr sz="1600" b="0" i="0">
+                <a:solidFill>
+                  <a:srgbClr val="2B2B2B"/>
+                </a:solidFill>
+                <a:latin typeface="Calibri"/>
+              </a:rPr>
+              <a:t>–   [ ] Mis </a:t>
+            </a:r>
+            <a:r>
+              <a:rPr sz="1600" b="1" i="0">
+                <a:solidFill>
+                  <a:srgbClr val="2B2B2B"/>
+                </a:solidFill>
+                <a:latin typeface="Calibri"/>
+              </a:rPr>
+              <a:t>3 referencias en APA 7</a:t>
+            </a:r>
+            <a:r>
+              <a:rPr sz="1600" b="0" i="0">
+                <a:solidFill>
+                  <a:srgbClr val="2B2B2B"/>
+                </a:solidFill>
+                <a:latin typeface="Calibri"/>
+              </a:rPr>
+              <a:t> están revisadas a mano (autores, año, revista, mayúsculas, DOI).</a:t>
             </a:r>
           </a:p>
         </p:txBody>
@@ -13408,7 +13661,7 @@
                 </a:solidFill>
                 <a:latin typeface="Calibri"/>
               </a:rPr>
-              <a:t>Trabajo autónomo · para la próxima sesión</a:t>
+              <a:t>Checklist antes de subir su entrega (cont.)</a:t>
             </a:r>
           </a:p>
         </p:txBody>
@@ -13447,7 +13700,7 @@
                 </a:solidFill>
                 <a:latin typeface="Calibri"/>
               </a:rPr>
-              <a:t>–   </a:t>
+              <a:t>–   [ ] Anoté, al lado de cada fuente, </a:t>
             </a:r>
             <a:r>
               <a:rPr sz="1600" b="1" i="0">
@@ -13456,16 +13709,16 @@
                 </a:solidFill>
                 <a:latin typeface="Calibri"/>
               </a:rPr>
-              <a:t>Deje reposar la pregunta un día y vuelva a leerla.</a:t>
-            </a:r>
-            <a:r>
-              <a:rPr sz="1600" b="0" i="0">
-                <a:solidFill>
-                  <a:srgbClr val="2B2B2B"/>
-                </a:solidFill>
-                <a:latin typeface="Calibri"/>
-              </a:rPr>
-              <a:t> Casi siempre se le puede quitar una palabra vaga.</a:t>
+              <a:t>una línea</a:t>
+            </a:r>
+            <a:r>
+              <a:rPr sz="1600" b="0" i="0">
+                <a:solidFill>
+                  <a:srgbClr val="2B2B2B"/>
+                </a:solidFill>
+                <a:latin typeface="Calibri"/>
+              </a:rPr>
+              <a:t> que diga por qué se relaciona con mi pregunta.</a:t>
             </a:r>
           </a:p>
           <a:p>
@@ -13481,7 +13734,7 @@
                 </a:solidFill>
                 <a:latin typeface="Calibri"/>
               </a:rPr>
-              <a:t>–   </a:t>
+              <a:t>–   [ ] Subí el archivo a </a:t>
             </a:r>
             <a:r>
               <a:rPr sz="1600" b="1" i="0">
@@ -13490,272 +13743,16 @@
                 </a:solidFill>
                 <a:latin typeface="Calibri"/>
               </a:rPr>
-              <a:t>Guarde el diagrama:</a:t>
-            </a:r>
-            <a:r>
-              <a:rPr sz="1600" b="0" i="0">
-                <a:solidFill>
-                  <a:srgbClr val="2B2B2B"/>
-                </a:solidFill>
-                <a:latin typeface="Calibri"/>
-              </a:rPr>
-              <a:t> las causas que dibujó hoy se convierten mañana en el cuerpo del planteamiento.</a:t>
-            </a:r>
-          </a:p>
-          <a:p>
-            <a:pPr>
-              <a:spcAft>
-                <a:spcPts val="1000"/>
-              </a:spcAft>
-            </a:pPr>
-            <a:r>
-              <a:rPr sz="1600" b="0" i="0">
-                <a:solidFill>
-                  <a:srgbClr val="2B2B2B"/>
-                </a:solidFill>
-                <a:latin typeface="Calibri"/>
-              </a:rPr>
-              <a:t>–   </a:t>
-            </a:r>
-            <a:r>
-              <a:rPr sz="1600" b="1" i="0">
-                <a:solidFill>
-                  <a:srgbClr val="2B2B2B"/>
-                </a:solidFill>
-                <a:latin typeface="Calibri"/>
-              </a:rPr>
-              <a:t>Marque las 2 o 3 causas más fuertes</a:t>
-            </a:r>
-            <a:r>
-              <a:rPr sz="1600" b="0" i="0">
-                <a:solidFill>
-                  <a:srgbClr val="2B2B2B"/>
-                </a:solidFill>
-                <a:latin typeface="Calibri"/>
-              </a:rPr>
-              <a:t> del diagrama: son las que va a defender con evidencia.</a:t>
-            </a:r>
-          </a:p>
-          <a:p>
-            <a:pPr>
-              <a:spcAft>
-                <a:spcPts val="1000"/>
-              </a:spcAft>
-            </a:pPr>
-            <a:r>
-              <a:rPr sz="1600" b="0" i="0">
-                <a:solidFill>
-                  <a:srgbClr val="2B2B2B"/>
-                </a:solidFill>
-                <a:latin typeface="Calibri"/>
-              </a:rPr>
-              <a:t>–   </a:t>
-            </a:r>
-            <a:r>
-              <a:rPr sz="1600" b="1" i="0">
-                <a:solidFill>
-                  <a:srgbClr val="2B2B2B"/>
-                </a:solidFill>
-                <a:latin typeface="Calibri"/>
-              </a:rPr>
-              <a:t>Empiece a coleccionar evidencia:</a:t>
-            </a:r>
-            <a:r>
-              <a:rPr sz="1600" b="0" i="0">
-                <a:solidFill>
-                  <a:srgbClr val="2B2B2B"/>
-                </a:solidFill>
-                <a:latin typeface="Calibri"/>
-              </a:rPr>
-              <a:t> cualquier cifra, bitácora, informe o queja documentada sobre su problema. Anote de dónde salió cada dato; sin la fuente, el dato no sirve.</a:t>
-            </a:r>
-          </a:p>
-          <a:p>
-            <a:pPr>
-              <a:spcAft>
-                <a:spcPts val="1000"/>
-              </a:spcAft>
-            </a:pPr>
-            <a:r>
-              <a:rPr sz="1600" b="0" i="0">
-                <a:solidFill>
-                  <a:srgbClr val="2B2B2B"/>
-                </a:solidFill>
-                <a:latin typeface="Calibri"/>
-              </a:rPr>
-              <a:t>–   </a:t>
-            </a:r>
-            <a:r>
-              <a:rPr sz="1600" b="1" i="0">
-                <a:solidFill>
-                  <a:srgbClr val="2B2B2B"/>
-                </a:solidFill>
-                <a:latin typeface="Calibri"/>
-              </a:rPr>
-              <a:t>Suba de 3 a 5 fuentes</a:t>
-            </a:r>
-            <a:r>
-              <a:rPr sz="1600" b="0" i="0">
-                <a:solidFill>
-                  <a:srgbClr val="2B2B2B"/>
-                </a:solidFill>
-                <a:latin typeface="Calibri"/>
-              </a:rPr>
-              <a:t> con el mismo método y guárdelas ya citadas en APA 7. Le van a hacer falta la próxima semana.</a:t>
-            </a:r>
-          </a:p>
-          <a:p>
-            <a:pPr>
-              <a:spcAft>
-                <a:spcPts val="1000"/>
-              </a:spcAft>
-            </a:pPr>
-            <a:r>
-              <a:rPr sz="1600" b="0" i="0">
-                <a:solidFill>
-                  <a:srgbClr val="2B2B2B"/>
-                </a:solidFill>
-                <a:latin typeface="Calibri"/>
-              </a:rPr>
-              <a:t>–   </a:t>
-            </a:r>
-            <a:r>
-              <a:rPr sz="1600" b="1" i="0">
-                <a:solidFill>
-                  <a:srgbClr val="2B2B2B"/>
-                </a:solidFill>
-                <a:latin typeface="Calibri"/>
-              </a:rPr>
-              <a:t>Subraye en su pregunta los 2 o 3 conceptos clave.</a:t>
-            </a:r>
-            <a:r>
-              <a:rPr sz="1600" b="0" i="0">
-                <a:solidFill>
-                  <a:srgbClr val="2B2B2B"/>
-                </a:solidFill>
-                <a:latin typeface="Calibri"/>
-              </a:rPr>
-              <a:t> Esos conceptos son los que va a rastrear en la literatura.</a:t>
-            </a:r>
-          </a:p>
-          <a:p>
-            <a:pPr>
-              <a:spcAft>
-                <a:spcPts val="1000"/>
-              </a:spcAft>
-            </a:pPr>
-            <a:r>
-              <a:rPr sz="1600" b="0" i="0">
-                <a:solidFill>
-                  <a:srgbClr val="2B2B2B"/>
-                </a:solidFill>
-                <a:latin typeface="Calibri"/>
-              </a:rPr>
-              <a:t>–   </a:t>
-            </a:r>
-            <a:r>
-              <a:rPr sz="1600" b="1" i="0">
-                <a:solidFill>
-                  <a:srgbClr val="2B2B2B"/>
-                </a:solidFill>
-                <a:latin typeface="Calibri"/>
-              </a:rPr>
-              <a:t>La próxima sesión son dos cosas otra vez:</a:t>
-            </a:r>
-            <a:r>
-              <a:rPr sz="1600" b="0" i="0">
-                <a:solidFill>
-                  <a:srgbClr val="2B2B2B"/>
-                </a:solidFill>
-                <a:latin typeface="Calibri"/>
-              </a:rPr>
-              <a:t> el </a:t>
-            </a:r>
-            <a:r>
-              <a:rPr sz="1600" b="1" i="0">
-                <a:solidFill>
-                  <a:srgbClr val="2B2B2B"/>
-                </a:solidFill>
-                <a:latin typeface="Calibri"/>
-              </a:rPr>
-              <a:t>planteamiento del problema</a:t>
-            </a:r>
-            <a:r>
-              <a:rPr sz="1600" b="0" i="0">
-                <a:solidFill>
-                  <a:srgbClr val="2B2B2B"/>
-                </a:solidFill>
-                <a:latin typeface="Calibri"/>
-              </a:rPr>
-              <a:t> completo y la primera página de </a:t>
-            </a:r>
-            <a:r>
-              <a:rPr sz="1600" b="1" i="0">
-                <a:solidFill>
-                  <a:srgbClr val="2B2B2B"/>
-                </a:solidFill>
-                <a:latin typeface="Calibri"/>
-              </a:rPr>
-              <a:t>marco teórico y revisión de literatura</a:t>
-            </a:r>
-            <a:r>
-              <a:rPr sz="1600" b="0" i="0">
-                <a:solidFill>
-                  <a:srgbClr val="2B2B2B"/>
-                </a:solidFill>
-                <a:latin typeface="Calibri"/>
-              </a:rPr>
-              <a:t>.</a:t>
-            </a:r>
-          </a:p>
-          <a:p>
-            <a:pPr lvl="1">
-              <a:spcAft>
-                <a:spcPts val="600"/>
-              </a:spcAft>
-            </a:pPr>
-            <a:r>
-              <a:rPr sz="1500" b="0" i="0">
-                <a:solidFill>
-                  <a:srgbClr val="2B2B2B"/>
-                </a:solidFill>
-                <a:latin typeface="Calibri"/>
-              </a:rPr>
-              <a:t>●   Traiga su pregunta, su diagrama y sus fuentes: sin ellos no hay con qué trabajar.</a:t>
-            </a:r>
-          </a:p>
-          <a:p>
-            <a:pPr lvl="1">
-              <a:spcAft>
-                <a:spcPts val="600"/>
-              </a:spcAft>
-            </a:pPr>
-            <a:r>
-              <a:rPr sz="1500" b="0" i="0">
-                <a:solidFill>
-                  <a:srgbClr val="2B2B2B"/>
-                </a:solidFill>
-                <a:latin typeface="Calibri"/>
-              </a:rPr>
-              <a:t>●   Es además la </a:t>
-            </a:r>
-            <a:r>
-              <a:rPr sz="1500" b="1" i="0">
-                <a:solidFill>
-                  <a:srgbClr val="2B2B2B"/>
-                </a:solidFill>
-                <a:latin typeface="Calibri"/>
-              </a:rPr>
-              <a:t>última sesión antes del cierre de la ACA Final</a:t>
-            </a:r>
-            <a:r>
-              <a:rPr sz="1500" b="0" i="0">
-                <a:solidFill>
-                  <a:srgbClr val="2B2B2B"/>
-                </a:solidFill>
-                <a:latin typeface="Calibri"/>
-              </a:rPr>
-              <a:t>: verifique hoy mismo en CDigital la fecha de recepción de trabajos.</a:t>
+              <a:t>CDigital</a:t>
+            </a:r>
+            <a:r>
+              <a:rPr sz="1600" b="0" i="0">
+                <a:solidFill>
+                  <a:srgbClr val="2B2B2B"/>
+                </a:solidFill>
+                <a:latin typeface="Calibri"/>
+              </a:rPr>
+              <a:t>: https://cdigital.cun.edu.co/course/view.php?id=111070</a:t>
             </a:r>
           </a:p>
         </p:txBody>
@@ -14418,7 +14415,7 @@
                 </a:solidFill>
                 <a:latin typeface="Calibri"/>
               </a:rPr>
-              <a:t>Trabajo autónomo · para la próxima sesión (cont.)</a:t>
+              <a:t>Trabajo autónomo · para la próxima sesión</a:t>
             </a:r>
           </a:p>
         </p:txBody>
@@ -14457,7 +14454,7 @@
                 </a:solidFill>
                 <a:latin typeface="Calibri"/>
               </a:rPr>
-              <a:t>–   Entrega y materiales en </a:t>
+              <a:t>–   </a:t>
             </a:r>
             <a:r>
               <a:rPr sz="1600" b="1" i="0">
@@ -14466,16 +14463,306 @@
                 </a:solidFill>
                 <a:latin typeface="Calibri"/>
               </a:rPr>
-              <a:t>CDigital</a:t>
-            </a:r>
-            <a:r>
-              <a:rPr sz="1600" b="0" i="0">
-                <a:solidFill>
-                  <a:srgbClr val="2B2B2B"/>
-                </a:solidFill>
-                <a:latin typeface="Calibri"/>
-              </a:rPr>
-              <a:t>: [URL CDigital — campus del curso pendiente]</a:t>
+              <a:t>Deje reposar la pregunta un día y vuelva a leerla.</a:t>
+            </a:r>
+            <a:r>
+              <a:rPr sz="1600" b="0" i="0">
+                <a:solidFill>
+                  <a:srgbClr val="2B2B2B"/>
+                </a:solidFill>
+                <a:latin typeface="Calibri"/>
+              </a:rPr>
+              <a:t> Casi siempre se le puede quitar una palabra vaga.</a:t>
+            </a:r>
+          </a:p>
+          <a:p>
+            <a:pPr>
+              <a:spcAft>
+                <a:spcPts val="1000"/>
+              </a:spcAft>
+            </a:pPr>
+            <a:r>
+              <a:rPr sz="1600" b="0" i="0">
+                <a:solidFill>
+                  <a:srgbClr val="2B2B2B"/>
+                </a:solidFill>
+                <a:latin typeface="Calibri"/>
+              </a:rPr>
+              <a:t>–   </a:t>
+            </a:r>
+            <a:r>
+              <a:rPr sz="1600" b="1" i="0">
+                <a:solidFill>
+                  <a:srgbClr val="2B2B2B"/>
+                </a:solidFill>
+                <a:latin typeface="Calibri"/>
+              </a:rPr>
+              <a:t>Guarde el diagrama:</a:t>
+            </a:r>
+            <a:r>
+              <a:rPr sz="1600" b="0" i="0">
+                <a:solidFill>
+                  <a:srgbClr val="2B2B2B"/>
+                </a:solidFill>
+                <a:latin typeface="Calibri"/>
+              </a:rPr>
+              <a:t> las causas que dibujó hoy se convierten mañana en el cuerpo del planteamiento.</a:t>
+            </a:r>
+          </a:p>
+          <a:p>
+            <a:pPr>
+              <a:spcAft>
+                <a:spcPts val="1000"/>
+              </a:spcAft>
+            </a:pPr>
+            <a:r>
+              <a:rPr sz="1600" b="0" i="0">
+                <a:solidFill>
+                  <a:srgbClr val="2B2B2B"/>
+                </a:solidFill>
+                <a:latin typeface="Calibri"/>
+              </a:rPr>
+              <a:t>–   </a:t>
+            </a:r>
+            <a:r>
+              <a:rPr sz="1600" b="1" i="0">
+                <a:solidFill>
+                  <a:srgbClr val="2B2B2B"/>
+                </a:solidFill>
+                <a:latin typeface="Calibri"/>
+              </a:rPr>
+              <a:t>Marque las 2 o 3 causas más fuertes</a:t>
+            </a:r>
+            <a:r>
+              <a:rPr sz="1600" b="0" i="0">
+                <a:solidFill>
+                  <a:srgbClr val="2B2B2B"/>
+                </a:solidFill>
+                <a:latin typeface="Calibri"/>
+              </a:rPr>
+              <a:t> del diagrama: son las que va a defender con evidencia.</a:t>
+            </a:r>
+          </a:p>
+          <a:p>
+            <a:pPr>
+              <a:spcAft>
+                <a:spcPts val="1000"/>
+              </a:spcAft>
+            </a:pPr>
+            <a:r>
+              <a:rPr sz="1600" b="0" i="0">
+                <a:solidFill>
+                  <a:srgbClr val="2B2B2B"/>
+                </a:solidFill>
+                <a:latin typeface="Calibri"/>
+              </a:rPr>
+              <a:t>–   </a:t>
+            </a:r>
+            <a:r>
+              <a:rPr sz="1600" b="1" i="0">
+                <a:solidFill>
+                  <a:srgbClr val="2B2B2B"/>
+                </a:solidFill>
+                <a:latin typeface="Calibri"/>
+              </a:rPr>
+              <a:t>Empiece a coleccionar evidencia:</a:t>
+            </a:r>
+            <a:r>
+              <a:rPr sz="1600" b="0" i="0">
+                <a:solidFill>
+                  <a:srgbClr val="2B2B2B"/>
+                </a:solidFill>
+                <a:latin typeface="Calibri"/>
+              </a:rPr>
+              <a:t> cualquier cifra, bitácora, informe o queja documentada sobre su problema. Anote de dónde salió cada dato; sin la fuente, el dato no sirve.</a:t>
+            </a:r>
+          </a:p>
+          <a:p>
+            <a:pPr>
+              <a:spcAft>
+                <a:spcPts val="1000"/>
+              </a:spcAft>
+            </a:pPr>
+            <a:r>
+              <a:rPr sz="1600" b="0" i="0">
+                <a:solidFill>
+                  <a:srgbClr val="2B2B2B"/>
+                </a:solidFill>
+                <a:latin typeface="Calibri"/>
+              </a:rPr>
+              <a:t>–   </a:t>
+            </a:r>
+            <a:r>
+              <a:rPr sz="1600" b="1" i="0">
+                <a:solidFill>
+                  <a:srgbClr val="2B2B2B"/>
+                </a:solidFill>
+                <a:latin typeface="Calibri"/>
+              </a:rPr>
+              <a:t>Suba de 3 a 5 fuentes</a:t>
+            </a:r>
+            <a:r>
+              <a:rPr sz="1600" b="0" i="0">
+                <a:solidFill>
+                  <a:srgbClr val="2B2B2B"/>
+                </a:solidFill>
+                <a:latin typeface="Calibri"/>
+              </a:rPr>
+              <a:t> con el mismo método y guárdelas ya citadas en APA 7. Le van a hacer falta la próxima semana.</a:t>
+            </a:r>
+          </a:p>
+          <a:p>
+            <a:pPr>
+              <a:spcAft>
+                <a:spcPts val="1000"/>
+              </a:spcAft>
+            </a:pPr>
+            <a:r>
+              <a:rPr sz="1600" b="0" i="0">
+                <a:solidFill>
+                  <a:srgbClr val="2B2B2B"/>
+                </a:solidFill>
+                <a:latin typeface="Calibri"/>
+              </a:rPr>
+              <a:t>–   </a:t>
+            </a:r>
+            <a:r>
+              <a:rPr sz="1600" b="1" i="0">
+                <a:solidFill>
+                  <a:srgbClr val="2B2B2B"/>
+                </a:solidFill>
+                <a:latin typeface="Calibri"/>
+              </a:rPr>
+              <a:t>Subraye en su pregunta los 2 o 3 conceptos clave.</a:t>
+            </a:r>
+            <a:r>
+              <a:rPr sz="1600" b="0" i="0">
+                <a:solidFill>
+                  <a:srgbClr val="2B2B2B"/>
+                </a:solidFill>
+                <a:latin typeface="Calibri"/>
+              </a:rPr>
+              <a:t> Esos conceptos son los que va a rastrear en la literatura.</a:t>
+            </a:r>
+          </a:p>
+          <a:p>
+            <a:pPr>
+              <a:spcAft>
+                <a:spcPts val="1000"/>
+              </a:spcAft>
+            </a:pPr>
+            <a:r>
+              <a:rPr sz="1600" b="0" i="0">
+                <a:solidFill>
+                  <a:srgbClr val="2B2B2B"/>
+                </a:solidFill>
+                <a:latin typeface="Calibri"/>
+              </a:rPr>
+              <a:t>–   </a:t>
+            </a:r>
+            <a:r>
+              <a:rPr sz="1600" b="1" i="0">
+                <a:solidFill>
+                  <a:srgbClr val="2B2B2B"/>
+                </a:solidFill>
+                <a:latin typeface="Calibri"/>
+              </a:rPr>
+              <a:t>La próxima sesión son dos cosas otra vez:</a:t>
+            </a:r>
+            <a:r>
+              <a:rPr sz="1600" b="0" i="0">
+                <a:solidFill>
+                  <a:srgbClr val="2B2B2B"/>
+                </a:solidFill>
+                <a:latin typeface="Calibri"/>
+              </a:rPr>
+              <a:t> el </a:t>
+            </a:r>
+            <a:r>
+              <a:rPr sz="1600" b="1" i="0">
+                <a:solidFill>
+                  <a:srgbClr val="2B2B2B"/>
+                </a:solidFill>
+                <a:latin typeface="Calibri"/>
+              </a:rPr>
+              <a:t>planteamiento del problema</a:t>
+            </a:r>
+            <a:r>
+              <a:rPr sz="1600" b="0" i="0">
+                <a:solidFill>
+                  <a:srgbClr val="2B2B2B"/>
+                </a:solidFill>
+                <a:latin typeface="Calibri"/>
+              </a:rPr>
+              <a:t> completo y la primera página de </a:t>
+            </a:r>
+            <a:r>
+              <a:rPr sz="1600" b="1" i="0">
+                <a:solidFill>
+                  <a:srgbClr val="2B2B2B"/>
+                </a:solidFill>
+                <a:latin typeface="Calibri"/>
+              </a:rPr>
+              <a:t>marco teórico y revisión de literatura</a:t>
+            </a:r>
+            <a:r>
+              <a:rPr sz="1600" b="0" i="0">
+                <a:solidFill>
+                  <a:srgbClr val="2B2B2B"/>
+                </a:solidFill>
+                <a:latin typeface="Calibri"/>
+              </a:rPr>
+              <a:t>.</a:t>
+            </a:r>
+          </a:p>
+          <a:p>
+            <a:pPr lvl="1">
+              <a:spcAft>
+                <a:spcPts val="600"/>
+              </a:spcAft>
+            </a:pPr>
+            <a:r>
+              <a:rPr sz="1500" b="0" i="0">
+                <a:solidFill>
+                  <a:srgbClr val="2B2B2B"/>
+                </a:solidFill>
+                <a:latin typeface="Calibri"/>
+              </a:rPr>
+              <a:t>●   Traiga su pregunta, su diagrama y sus fuentes: sin ellos no hay con qué trabajar.</a:t>
+            </a:r>
+          </a:p>
+          <a:p>
+            <a:pPr lvl="1">
+              <a:spcAft>
+                <a:spcPts val="600"/>
+              </a:spcAft>
+            </a:pPr>
+            <a:r>
+              <a:rPr sz="1500" b="0" i="0">
+                <a:solidFill>
+                  <a:srgbClr val="2B2B2B"/>
+                </a:solidFill>
+                <a:latin typeface="Calibri"/>
+              </a:rPr>
+              <a:t>●   Es además la </a:t>
+            </a:r>
+            <a:r>
+              <a:rPr sz="1500" b="1" i="0">
+                <a:solidFill>
+                  <a:srgbClr val="2B2B2B"/>
+                </a:solidFill>
+                <a:latin typeface="Calibri"/>
+              </a:rPr>
+              <a:t>última sesión antes del cierre de la ACA Final</a:t>
+            </a:r>
+            <a:r>
+              <a:rPr sz="1500" b="0" i="0">
+                <a:solidFill>
+                  <a:srgbClr val="2B2B2B"/>
+                </a:solidFill>
+                <a:latin typeface="Calibri"/>
+              </a:rPr>
+              <a:t>: verifique hoy mismo en CDigital la fecha de recepción de trabajos.</a:t>
             </a:r>
           </a:p>
         </p:txBody>
@@ -14524,6 +14811,1411 @@
 </file>
 
 <file path=ppt/slides/slide31.xml><?xml version="1.0" encoding="utf-8"?>
+<p:sld xmlns:a="http://schemas.openxmlformats.org/drawingml/2006/main" xmlns:p="http://schemas.openxmlformats.org/presentationml/2006/main" xmlns:r="http://schemas.openxmlformats.org/officeDocument/2006/relationships">
+  <p:cSld>
+    <p:bg>
+      <p:bgPr>
+        <a:solidFill>
+          <a:srgbClr val="FFFFFF"/>
+        </a:solidFill>
+        <a:effectLst/>
+      </p:bgPr>
+    </p:bg>
+    <p:spTree>
+      <p:nvGrpSpPr>
+        <p:cNvPr id="1" name=""/>
+        <p:cNvGrpSpPr/>
+        <p:nvPr/>
+      </p:nvGrpSpPr>
+      <p:grpSpPr/>
+      <p:sp>
+        <p:nvSpPr>
+          <p:cNvPr id="2" name="Rectangle 1"/>
+          <p:cNvSpPr/>
+          <p:nvPr/>
+        </p:nvSpPr>
+        <p:spPr>
+          <a:xfrm>
+            <a:off x="0" y="0"/>
+            <a:ext cx="12191695" cy="1188720"/>
+          </a:xfrm>
+          <a:prstGeom prst="rect">
+            <a:avLst/>
+          </a:prstGeom>
+          <a:solidFill>
+            <a:srgbClr val="0C2340"/>
+          </a:solidFill>
+          <a:ln>
+            <a:noFill/>
+          </a:ln>
+          <a:effectLst/>
+        </p:spPr>
+        <p:style>
+          <a:lnRef idx="1">
+            <a:schemeClr val="accent1"/>
+          </a:lnRef>
+          <a:fillRef idx="3">
+            <a:schemeClr val="accent1"/>
+          </a:fillRef>
+          <a:effectRef idx="2">
+            <a:schemeClr val="accent1"/>
+          </a:effectRef>
+          <a:fontRef idx="minor">
+            <a:schemeClr val="lt1"/>
+          </a:fontRef>
+        </p:style>
+        <p:txBody>
+          <a:bodyPr rtlCol="0" anchor="ctr"/>
+          <a:lstStyle/>
+          <a:p>
+            <a:pPr algn="ctr"/>
+          </a:p>
+        </p:txBody>
+      </p:sp>
+      <p:sp>
+        <p:nvSpPr>
+          <p:cNvPr id="3" name="TextBox 2"/>
+          <p:cNvSpPr txBox="1"/>
+          <p:nvPr/>
+        </p:nvSpPr>
+        <p:spPr>
+          <a:xfrm>
+            <a:off x="640080" y="0"/>
+            <a:ext cx="9082735" cy="1188720"/>
+          </a:xfrm>
+          <a:prstGeom prst="rect">
+            <a:avLst/>
+          </a:prstGeom>
+          <a:noFill/>
+        </p:spPr>
+        <p:txBody>
+          <a:bodyPr wrap="square" anchor="ctr" lIns="0" rIns="0" tIns="0" bIns="0">
+            <a:spAutoFit/>
+          </a:bodyPr>
+          <a:lstStyle/>
+          <a:p>
+            <a:pPr algn="ctr"/>
+            <a:r>
+              <a:rPr sz="2600" b="1" i="0">
+                <a:solidFill>
+                  <a:srgbClr val="FFFFFF"/>
+                </a:solidFill>
+                <a:latin typeface="Calibri"/>
+              </a:rPr>
+              <a:t>Trabajo autónomo · para la próxima sesión (cont.)</a:t>
+            </a:r>
+          </a:p>
+        </p:txBody>
+      </p:sp>
+      <p:sp>
+        <p:nvSpPr>
+          <p:cNvPr id="4" name="TextBox 3"/>
+          <p:cNvSpPr txBox="1"/>
+          <p:nvPr/>
+        </p:nvSpPr>
+        <p:spPr>
+          <a:xfrm>
+            <a:off x="640080" y="1691639"/>
+            <a:ext cx="10911535" cy="4617720"/>
+          </a:xfrm>
+          <a:prstGeom prst="rect">
+            <a:avLst/>
+          </a:prstGeom>
+          <a:noFill/>
+        </p:spPr>
+        <p:txBody>
+          <a:bodyPr wrap="square" anchor="t" lIns="0" rIns="0" tIns="0" bIns="0">
+            <a:spAutoFit/>
+          </a:bodyPr>
+          <a:lstStyle/>
+          <a:p>
+            <a:pPr>
+              <a:spcAft>
+                <a:spcPts val="1000"/>
+              </a:spcAft>
+            </a:pPr>
+            <a:r>
+              <a:rPr sz="1600" b="0" i="0">
+                <a:solidFill>
+                  <a:srgbClr val="2B2B2B"/>
+                </a:solidFill>
+                <a:latin typeface="Calibri"/>
+              </a:rPr>
+              <a:t>–   Entrega y materiales en </a:t>
+            </a:r>
+            <a:r>
+              <a:rPr sz="1600" b="1" i="0">
+                <a:solidFill>
+                  <a:srgbClr val="2B2B2B"/>
+                </a:solidFill>
+                <a:latin typeface="Calibri"/>
+              </a:rPr>
+              <a:t>CDigital</a:t>
+            </a:r>
+            <a:r>
+              <a:rPr sz="1600" b="0" i="0">
+                <a:solidFill>
+                  <a:srgbClr val="2B2B2B"/>
+                </a:solidFill>
+                <a:latin typeface="Calibri"/>
+              </a:rPr>
+              <a:t>: https://cdigital.cun.edu.co/course/view.php?id=111070</a:t>
+            </a:r>
+          </a:p>
+        </p:txBody>
+      </p:sp>
+      <p:sp>
+        <p:nvSpPr>
+          <p:cNvPr id="5" name="TextBox 4"/>
+          <p:cNvSpPr txBox="1"/>
+          <p:nvPr/>
+        </p:nvSpPr>
+        <p:spPr>
+          <a:xfrm>
+            <a:off x="11094415" y="6446520"/>
+            <a:ext cx="548640" cy="274320"/>
+          </a:xfrm>
+          <a:prstGeom prst="rect">
+            <a:avLst/>
+          </a:prstGeom>
+          <a:noFill/>
+        </p:spPr>
+        <p:txBody>
+          <a:bodyPr wrap="square" anchor="t" lIns="0" rIns="0" tIns="0" bIns="0">
+            <a:spAutoFit/>
+          </a:bodyPr>
+          <a:lstStyle/>
+          <a:p>
+            <a:pPr algn="r"/>
+            <a:r>
+              <a:rPr sz="1000" b="1" i="0">
+                <a:solidFill>
+                  <a:srgbClr val="8F989D"/>
+                </a:solidFill>
+                <a:latin typeface="Calibri"/>
+              </a:rPr>
+              <a:t>31</a:t>
+            </a:r>
+          </a:p>
+        </p:txBody>
+      </p:sp>
+    </p:spTree>
+  </p:cSld>
+  <p:clrMapOvr>
+    <a:masterClrMapping/>
+  </p:clrMapOvr>
+</p:sld>
+</file>
+
+<file path=ppt/slides/slide32.xml><?xml version="1.0" encoding="utf-8"?>
+<p:sld xmlns:a="http://schemas.openxmlformats.org/drawingml/2006/main" xmlns:p="http://schemas.openxmlformats.org/presentationml/2006/main" xmlns:r="http://schemas.openxmlformats.org/officeDocument/2006/relationships">
+  <p:cSld>
+    <p:bg>
+      <p:bgPr>
+        <a:solidFill>
+          <a:srgbClr val="FFFFFF"/>
+        </a:solidFill>
+        <a:effectLst/>
+      </p:bgPr>
+    </p:bg>
+    <p:spTree>
+      <p:nvGrpSpPr>
+        <p:cNvPr id="1" name=""/>
+        <p:cNvGrpSpPr/>
+        <p:nvPr/>
+      </p:nvGrpSpPr>
+      <p:grpSpPr/>
+      <p:sp>
+        <p:nvSpPr>
+          <p:cNvPr id="2" name="Rectangle 1"/>
+          <p:cNvSpPr/>
+          <p:nvPr/>
+        </p:nvSpPr>
+        <p:spPr>
+          <a:xfrm>
+            <a:off x="0" y="0"/>
+            <a:ext cx="12191695" cy="1188720"/>
+          </a:xfrm>
+          <a:prstGeom prst="rect">
+            <a:avLst/>
+          </a:prstGeom>
+          <a:solidFill>
+            <a:srgbClr val="0C2340"/>
+          </a:solidFill>
+          <a:ln>
+            <a:noFill/>
+          </a:ln>
+          <a:effectLst/>
+        </p:spPr>
+        <p:style>
+          <a:lnRef idx="1">
+            <a:schemeClr val="accent1"/>
+          </a:lnRef>
+          <a:fillRef idx="3">
+            <a:schemeClr val="accent1"/>
+          </a:fillRef>
+          <a:effectRef idx="2">
+            <a:schemeClr val="accent1"/>
+          </a:effectRef>
+          <a:fontRef idx="minor">
+            <a:schemeClr val="lt1"/>
+          </a:fontRef>
+        </p:style>
+        <p:txBody>
+          <a:bodyPr rtlCol="0" anchor="ctr"/>
+          <a:lstStyle/>
+          <a:p>
+            <a:pPr algn="ctr"/>
+          </a:p>
+        </p:txBody>
+      </p:sp>
+      <p:sp>
+        <p:nvSpPr>
+          <p:cNvPr id="3" name="TextBox 2"/>
+          <p:cNvSpPr txBox="1"/>
+          <p:nvPr/>
+        </p:nvSpPr>
+        <p:spPr>
+          <a:xfrm>
+            <a:off x="640080" y="0"/>
+            <a:ext cx="9082735" cy="1188720"/>
+          </a:xfrm>
+          <a:prstGeom prst="rect">
+            <a:avLst/>
+          </a:prstGeom>
+          <a:noFill/>
+        </p:spPr>
+        <p:txBody>
+          <a:bodyPr wrap="square" anchor="ctr" lIns="0" rIns="0" tIns="0" bIns="0">
+            <a:spAutoFit/>
+          </a:bodyPr>
+          <a:lstStyle/>
+          <a:p>
+            <a:pPr algn="ctr"/>
+            <a:r>
+              <a:rPr sz="2600" b="1" i="0">
+                <a:solidFill>
+                  <a:srgbClr val="FFFFFF"/>
+                </a:solidFill>
+                <a:latin typeface="Calibri"/>
+              </a:rPr>
+              <a:t>RUTA DE ENTREGABLES DEL CURSO</a:t>
+            </a:r>
+          </a:p>
+        </p:txBody>
+      </p:sp>
+      <p:sp>
+        <p:nvSpPr>
+          <p:cNvPr id="4" name="TextBox 3"/>
+          <p:cNvSpPr txBox="1"/>
+          <p:nvPr/>
+        </p:nvSpPr>
+        <p:spPr>
+          <a:xfrm>
+            <a:off x="640080" y="1280160"/>
+            <a:ext cx="10911535" cy="411480"/>
+          </a:xfrm>
+          <a:prstGeom prst="rect">
+            <a:avLst/>
+          </a:prstGeom>
+          <a:noFill/>
+        </p:spPr>
+        <p:txBody>
+          <a:bodyPr wrap="square" anchor="t" lIns="0" rIns="0" tIns="0" bIns="0">
+            <a:spAutoFit/>
+          </a:bodyPr>
+          <a:lstStyle/>
+          <a:p>
+            <a:pPr algn="ctr"/>
+            <a:r>
+              <a:rPr sz="1500" b="0" i="0">
+                <a:solidFill>
+                  <a:srgbClr val="2B2B2B"/>
+                </a:solidFill>
+                <a:latin typeface="Calibri"/>
+              </a:rPr>
+              <a:t>Sin fechas a propósito: aquí va </a:t>
+            </a:r>
+            <a:r>
+              <a:rPr sz="1500" b="1" i="0">
+                <a:solidFill>
+                  <a:srgbClr val="2B2B2B"/>
+                </a:solidFill>
+                <a:latin typeface="Calibri"/>
+              </a:rPr>
+              <a:t>en qué punto del curso</a:t>
+            </a:r>
+            <a:r>
+              <a:rPr sz="1500" b="0" i="0">
+                <a:solidFill>
+                  <a:srgbClr val="2B2B2B"/>
+                </a:solidFill>
+                <a:latin typeface="Calibri"/>
+              </a:rPr>
+              <a:t> cierra cada ítem · la ventana exacta la fija CDigital</a:t>
+            </a:r>
+          </a:p>
+        </p:txBody>
+      </p:sp>
+      <p:graphicFrame>
+        <p:nvGraphicFramePr>
+          <p:cNvPr id="5" name="Table 4"/>
+          <p:cNvGraphicFramePr>
+            <a:graphicFrameLocks noGrp="1"/>
+          </p:cNvGraphicFramePr>
+          <p:nvPr/>
+        </p:nvGraphicFramePr>
+        <p:xfrm>
+          <a:off x="640080" y="2011679"/>
+          <a:ext cx="10911533" cy="4297680"/>
+        </p:xfrm>
+        <a:graphic>
+          <a:graphicData uri="http://schemas.openxmlformats.org/drawingml/2006/table">
+            <a:tbl>
+              <a:tblPr>
+                <a:tableStyleId>{2D5ABB26-0587-4C30-8999-92F81FD0307C}</a:tableStyleId>
+              </a:tblPr>
+              <a:tblGrid>
+                <a:gridCol w="2659113"/>
+                <a:gridCol w="2659113"/>
+                <a:gridCol w="5593307"/>
+              </a:tblGrid>
+              <a:tr h="477520">
+                <a:tc>
+                  <a:txBody>
+                    <a:bodyPr/>
+                    <a:lstStyle/>
+                    <a:p>
+                      <a:pPr algn="l"/>
+                      <a:r>
+                        <a:rPr sz="1300" b="1" i="0">
+                          <a:solidFill>
+                            <a:srgbClr val="FFFFFF"/>
+                          </a:solidFill>
+                          <a:latin typeface="Calibri"/>
+                        </a:rPr>
+                        <a:t>Cierra en la semana de…</a:t>
+                      </a:r>
+                    </a:p>
+                  </a:txBody>
+                  <a:tcPr anchor="ctr" marL="109728" marR="91440" marT="36576" marB="36576">
+                    <a:solidFill>
+                      <a:srgbClr val="0C2340"/>
+                    </a:solidFill>
+                  </a:tcPr>
+                </a:tc>
+                <a:tc>
+                  <a:txBody>
+                    <a:bodyPr/>
+                    <a:lstStyle/>
+                    <a:p>
+                      <a:pPr algn="l"/>
+                      <a:r>
+                        <a:rPr sz="1300" b="1" i="0">
+                          <a:solidFill>
+                            <a:srgbClr val="FFFFFF"/>
+                          </a:solidFill>
+                          <a:latin typeface="Calibri"/>
+                        </a:rPr>
+                        <a:t>Entregable</a:t>
+                      </a:r>
+                    </a:p>
+                  </a:txBody>
+                  <a:tcPr anchor="ctr" marL="109728" marR="91440" marT="36576" marB="36576">
+                    <a:solidFill>
+                      <a:srgbClr val="0C2340"/>
+                    </a:solidFill>
+                  </a:tcPr>
+                </a:tc>
+                <a:tc>
+                  <a:txBody>
+                    <a:bodyPr/>
+                    <a:lstStyle/>
+                    <a:p>
+                      <a:pPr algn="l"/>
+                      <a:r>
+                        <a:rPr sz="1300" b="1" i="0">
+                          <a:solidFill>
+                            <a:srgbClr val="FFFFFF"/>
+                          </a:solidFill>
+                          <a:latin typeface="Calibri"/>
+                        </a:rPr>
+                        <a:t>Qué debes tener listo</a:t>
+                      </a:r>
+                    </a:p>
+                  </a:txBody>
+                  <a:tcPr anchor="ctr" marL="109728" marR="91440" marT="36576" marB="36576">
+                    <a:solidFill>
+                      <a:srgbClr val="0C2340"/>
+                    </a:solidFill>
+                  </a:tcPr>
+                </a:tc>
+              </a:tr>
+              <a:tr h="477520">
+                <a:tc>
+                  <a:txBody>
+                    <a:bodyPr/>
+                    <a:lstStyle/>
+                    <a:p>
+                      <a:pPr algn="l"/>
+                      <a:r>
+                        <a:rPr sz="1100" b="1" i="0">
+                          <a:solidFill>
+                            <a:srgbClr val="2B2B2B"/>
+                          </a:solidFill>
+                          <a:latin typeface="Calibri"/>
+                        </a:rPr>
+                        <a:t>Sesión 02</a:t>
+                      </a:r>
+                      <a:r>
+                        <a:rPr sz="1100" b="0" i="0">
+                          <a:solidFill>
+                            <a:srgbClr val="2B2B2B"/>
+                          </a:solidFill>
+                          <a:latin typeface="Calibri"/>
+                        </a:rPr>
+                        <a:t> · ya cerró</a:t>
+                      </a:r>
+                    </a:p>
+                  </a:txBody>
+                  <a:tcPr anchor="ctr" marL="109728" marR="91440" marT="36576" marB="36576">
+                    <a:solidFill>
+                      <a:srgbClr val="FFFFFF"/>
+                    </a:solidFill>
+                  </a:tcPr>
+                </a:tc>
+                <a:tc>
+                  <a:txBody>
+                    <a:bodyPr/>
+                    <a:lstStyle/>
+                    <a:p>
+                      <a:pPr algn="l"/>
+                      <a:r>
+                        <a:rPr sz="1100" b="1" i="0">
+                          <a:solidFill>
+                            <a:srgbClr val="2B2B2B"/>
+                          </a:solidFill>
+                          <a:latin typeface="Calibri"/>
+                        </a:rPr>
+                        <a:t>Quiz 1</a:t>
+                      </a:r>
+                      <a:r>
+                        <a:rPr sz="1100" b="0" i="0">
+                          <a:solidFill>
+                            <a:srgbClr val="2B2B2B"/>
+                          </a:solidFill>
+                          <a:latin typeface="Calibri"/>
+                        </a:rPr>
+                        <a:t> · Cuestionario · 6%</a:t>
+                      </a:r>
+                    </a:p>
+                  </a:txBody>
+                  <a:tcPr anchor="ctr" marL="109728" marR="91440" marT="36576" marB="36576">
+                    <a:solidFill>
+                      <a:srgbClr val="FFFFFF"/>
+                    </a:solidFill>
+                  </a:tcPr>
+                </a:tc>
+                <a:tc>
+                  <a:txBody>
+                    <a:bodyPr/>
+                    <a:lstStyle/>
+                    <a:p>
+                      <a:pPr algn="l"/>
+                      <a:r>
+                        <a:rPr sz="1100" b="0" i="0">
+                          <a:solidFill>
+                            <a:srgbClr val="2B2B2B"/>
+                          </a:solidFill>
+                          <a:latin typeface="Calibri"/>
+                        </a:rPr>
+                        <a:t>Ten claras las </a:t>
+                      </a:r>
+                      <a:r>
+                        <a:rPr sz="1100" b="1" i="0">
+                          <a:solidFill>
+                            <a:srgbClr val="2B2B2B"/>
+                          </a:solidFill>
+                          <a:latin typeface="Calibri"/>
+                        </a:rPr>
+                        <a:t>etapas del método</a:t>
+                      </a:r>
+                      <a:r>
+                        <a:rPr sz="1100" b="0" i="0">
+                          <a:solidFill>
+                            <a:srgbClr val="2B2B2B"/>
+                          </a:solidFill>
+                          <a:latin typeface="Calibri"/>
+                        </a:rPr>
+                        <a:t> y qué es un artículo de nuevo conocimiento.</a:t>
+                      </a:r>
+                    </a:p>
+                  </a:txBody>
+                  <a:tcPr anchor="ctr" marL="109728" marR="91440" marT="36576" marB="36576">
+                    <a:solidFill>
+                      <a:srgbClr val="FFFFFF"/>
+                    </a:solidFill>
+                  </a:tcPr>
+                </a:tc>
+              </a:tr>
+              <a:tr h="477520">
+                <a:tc>
+                  <a:txBody>
+                    <a:bodyPr/>
+                    <a:lstStyle/>
+                    <a:p>
+                      <a:pPr algn="l"/>
+                      <a:r>
+                        <a:rPr sz="1100" b="1" i="0">
+                          <a:solidFill>
+                            <a:srgbClr val="2B2B2B"/>
+                          </a:solidFill>
+                          <a:latin typeface="Calibri"/>
+                        </a:rPr>
+                        <a:t>Sesión 03</a:t>
+                      </a:r>
+                      <a:r>
+                        <a:rPr sz="1100" b="0" i="0">
+                          <a:solidFill>
+                            <a:srgbClr val="2B2B2B"/>
+                          </a:solidFill>
+                          <a:latin typeface="Calibri"/>
+                        </a:rPr>
+                        <a:t> · ya cerró</a:t>
+                      </a:r>
+                    </a:p>
+                  </a:txBody>
+                  <a:tcPr anchor="ctr" marL="109728" marR="91440" marT="36576" marB="36576">
+                    <a:solidFill>
+                      <a:srgbClr val="F2F2F2"/>
+                    </a:solidFill>
+                  </a:tcPr>
+                </a:tc>
+                <a:tc>
+                  <a:txBody>
+                    <a:bodyPr/>
+                    <a:lstStyle/>
+                    <a:p>
+                      <a:pPr algn="l"/>
+                      <a:r>
+                        <a:rPr sz="1100" b="1" i="0">
+                          <a:solidFill>
+                            <a:srgbClr val="2B2B2B"/>
+                          </a:solidFill>
+                          <a:latin typeface="Calibri"/>
+                        </a:rPr>
+                        <a:t>Parcial 1</a:t>
+                      </a:r>
+                      <a:r>
+                        <a:rPr sz="1100" b="0" i="0">
+                          <a:solidFill>
+                            <a:srgbClr val="2B2B2B"/>
+                          </a:solidFill>
+                          <a:latin typeface="Calibri"/>
+                        </a:rPr>
+                        <a:t> · Cuestionario · 24%</a:t>
+                      </a:r>
+                    </a:p>
+                  </a:txBody>
+                  <a:tcPr anchor="ctr" marL="109728" marR="91440" marT="36576" marB="36576">
+                    <a:solidFill>
+                      <a:srgbClr val="F2F2F2"/>
+                    </a:solidFill>
+                  </a:tcPr>
+                </a:tc>
+                <a:tc>
+                  <a:txBody>
+                    <a:bodyPr/>
+                    <a:lstStyle/>
+                    <a:p>
+                      <a:pPr algn="l"/>
+                      <a:r>
+                        <a:rPr sz="1100" b="0" i="0">
+                          <a:solidFill>
+                            <a:srgbClr val="2B2B2B"/>
+                          </a:solidFill>
+                          <a:latin typeface="Calibri"/>
+                        </a:rPr>
+                        <a:t>Ten memorizadas las </a:t>
+                      </a:r>
+                      <a:r>
+                        <a:rPr sz="1100" b="1" i="0">
+                          <a:solidFill>
+                            <a:srgbClr val="2B2B2B"/>
+                          </a:solidFill>
+                          <a:latin typeface="Calibri"/>
+                        </a:rPr>
+                        <a:t>6 líneas</a:t>
+                      </a:r>
+                      <a:r>
+                        <a:rPr sz="1100" b="0" i="0">
+                          <a:solidFill>
+                            <a:srgbClr val="2B2B2B"/>
+                          </a:solidFill>
+                          <a:latin typeface="Calibri"/>
+                        </a:rPr>
+                        <a:t> de MinCiencias y en cuál se ubica tu tema, y por qué.</a:t>
+                      </a:r>
+                    </a:p>
+                  </a:txBody>
+                  <a:tcPr anchor="ctr" marL="109728" marR="91440" marT="36576" marB="36576">
+                    <a:solidFill>
+                      <a:srgbClr val="F2F2F2"/>
+                    </a:solidFill>
+                  </a:tcPr>
+                </a:tc>
+              </a:tr>
+              <a:tr h="477520">
+                <a:tc>
+                  <a:txBody>
+                    <a:bodyPr/>
+                    <a:lstStyle/>
+                    <a:p>
+                      <a:pPr algn="l"/>
+                      <a:r>
+                        <a:rPr sz="1100" b="1" i="0">
+                          <a:solidFill>
+                            <a:srgbClr val="2B2B2B"/>
+                          </a:solidFill>
+                          <a:latin typeface="Calibri"/>
+                        </a:rPr>
+                        <a:t>Sesión 04</a:t>
+                      </a:r>
+                      <a:r>
+                        <a:rPr sz="1100" b="0" i="0">
+                          <a:solidFill>
+                            <a:srgbClr val="2B2B2B"/>
+                          </a:solidFill>
+                          <a:latin typeface="Calibri"/>
+                        </a:rPr>
+                        <a:t> · cierra esta semana</a:t>
+                      </a:r>
+                    </a:p>
+                  </a:txBody>
+                  <a:tcPr anchor="ctr" marL="109728" marR="91440" marT="36576" marB="36576">
+                    <a:solidFill>
+                      <a:srgbClr val="FFFFFF"/>
+                    </a:solidFill>
+                  </a:tcPr>
+                </a:tc>
+                <a:tc>
+                  <a:txBody>
+                    <a:bodyPr/>
+                    <a:lstStyle/>
+                    <a:p>
+                      <a:pPr algn="l"/>
+                      <a:r>
+                        <a:rPr sz="1100" b="1" i="0">
+                          <a:solidFill>
+                            <a:srgbClr val="2B2B2B"/>
+                          </a:solidFill>
+                          <a:latin typeface="Calibri"/>
+                        </a:rPr>
+                        <a:t>Quiz 2</a:t>
+                      </a:r>
+                      <a:r>
+                        <a:rPr sz="1100" b="0" i="0">
+                          <a:solidFill>
+                            <a:srgbClr val="2B2B2B"/>
+                          </a:solidFill>
+                          <a:latin typeface="Calibri"/>
+                        </a:rPr>
+                        <a:t> · Cuestionario · 9%</a:t>
+                      </a:r>
+                    </a:p>
+                  </a:txBody>
+                  <a:tcPr anchor="ctr" marL="109728" marR="91440" marT="36576" marB="36576">
+                    <a:solidFill>
+                      <a:srgbClr val="FFFFFF"/>
+                    </a:solidFill>
+                  </a:tcPr>
+                </a:tc>
+                <a:tc>
+                  <a:txBody>
+                    <a:bodyPr/>
+                    <a:lstStyle/>
+                    <a:p>
+                      <a:pPr algn="l"/>
+                      <a:r>
+                        <a:rPr sz="1100" b="0" i="0">
+                          <a:solidFill>
+                            <a:srgbClr val="2B2B2B"/>
+                          </a:solidFill>
+                          <a:latin typeface="Calibri"/>
+                        </a:rPr>
+                        <a:t>Distingue </a:t>
+                      </a:r>
+                      <a:r>
+                        <a:rPr sz="1100" b="1" i="0">
+                          <a:solidFill>
+                            <a:srgbClr val="2B2B2B"/>
+                          </a:solidFill>
+                          <a:latin typeface="Calibri"/>
+                        </a:rPr>
+                        <a:t>tipos de fuente</a:t>
+                      </a:r>
+                      <a:r>
+                        <a:rPr sz="1100" b="0" i="0">
+                          <a:solidFill>
+                            <a:srgbClr val="2B2B2B"/>
+                          </a:solidFill>
+                          <a:latin typeface="Calibri"/>
+                        </a:rPr>
+                        <a:t> y qué la hace confiable: quién firma, dónde y de cuándo es.</a:t>
+                      </a:r>
+                    </a:p>
+                  </a:txBody>
+                  <a:tcPr anchor="ctr" marL="109728" marR="91440" marT="36576" marB="36576">
+                    <a:solidFill>
+                      <a:srgbClr val="FFFFFF"/>
+                    </a:solidFill>
+                  </a:tcPr>
+                </a:tc>
+              </a:tr>
+              <a:tr h="477520">
+                <a:tc>
+                  <a:txBody>
+                    <a:bodyPr/>
+                    <a:lstStyle/>
+                    <a:p>
+                      <a:pPr algn="l"/>
+                      <a:r>
+                        <a:rPr sz="1100" b="1" i="0">
+                          <a:solidFill>
+                            <a:srgbClr val="2B2B2B"/>
+                          </a:solidFill>
+                          <a:latin typeface="Calibri"/>
+                        </a:rPr>
+                        <a:t>Sesión 05</a:t>
+                      </a:r>
+                      <a:r>
+                        <a:rPr sz="1100" b="0" i="0">
+                          <a:solidFill>
+                            <a:srgbClr val="2B2B2B"/>
+                          </a:solidFill>
+                          <a:latin typeface="Calibri"/>
+                        </a:rPr>
+                        <a:t> · pendiente</a:t>
+                      </a:r>
+                    </a:p>
+                  </a:txBody>
+                  <a:tcPr anchor="ctr" marL="109728" marR="91440" marT="36576" marB="36576">
+                    <a:solidFill>
+                      <a:srgbClr val="F2F2F2"/>
+                    </a:solidFill>
+                  </a:tcPr>
+                </a:tc>
+                <a:tc>
+                  <a:txBody>
+                    <a:bodyPr/>
+                    <a:lstStyle/>
+                    <a:p>
+                      <a:pPr algn="l"/>
+                      <a:r>
+                        <a:rPr sz="1100" b="1" i="0">
+                          <a:solidFill>
+                            <a:srgbClr val="2B2B2B"/>
+                          </a:solidFill>
+                          <a:latin typeface="Calibri"/>
+                        </a:rPr>
+                        <a:t>Parcial 2</a:t>
+                      </a:r>
+                      <a:r>
+                        <a:rPr sz="1100" b="0" i="0">
+                          <a:solidFill>
+                            <a:srgbClr val="2B2B2B"/>
+                          </a:solidFill>
+                          <a:latin typeface="Calibri"/>
+                        </a:rPr>
+                        <a:t> · Cuestionario · 21%</a:t>
+                      </a:r>
+                    </a:p>
+                  </a:txBody>
+                  <a:tcPr anchor="ctr" marL="109728" marR="91440" marT="36576" marB="36576">
+                    <a:solidFill>
+                      <a:srgbClr val="F2F2F2"/>
+                    </a:solidFill>
+                  </a:tcPr>
+                </a:tc>
+                <a:tc>
+                  <a:txBody>
+                    <a:bodyPr/>
+                    <a:lstStyle/>
+                    <a:p>
+                      <a:pPr algn="l"/>
+                      <a:r>
+                        <a:rPr sz="1100" b="0" i="0">
+                          <a:solidFill>
+                            <a:srgbClr val="2B2B2B"/>
+                          </a:solidFill>
+                          <a:latin typeface="Calibri"/>
+                        </a:rPr>
+                        <a:t>Domina problema, pregunta y objetivo, búsqueda con operadores y citas en </a:t>
+                      </a:r>
+                      <a:r>
+                        <a:rPr sz="1100" b="1" i="0">
+                          <a:solidFill>
+                            <a:srgbClr val="2B2B2B"/>
+                          </a:solidFill>
+                          <a:latin typeface="Calibri"/>
+                        </a:rPr>
+                        <a:t>APA 7</a:t>
+                      </a:r>
+                      <a:r>
+                        <a:rPr sz="1100" b="0" i="0">
+                          <a:solidFill>
+                            <a:srgbClr val="2B2B2B"/>
+                          </a:solidFill>
+                          <a:latin typeface="Calibri"/>
+                        </a:rPr>
+                        <a:t>.</a:t>
+                      </a:r>
+                    </a:p>
+                  </a:txBody>
+                  <a:tcPr anchor="ctr" marL="109728" marR="91440" marT="36576" marB="36576">
+                    <a:solidFill>
+                      <a:srgbClr val="F2F2F2"/>
+                    </a:solidFill>
+                  </a:tcPr>
+                </a:tc>
+              </a:tr>
+              <a:tr h="477520">
+                <a:tc>
+                  <a:txBody>
+                    <a:bodyPr/>
+                    <a:lstStyle/>
+                    <a:p>
+                      <a:pPr algn="l"/>
+                      <a:r>
+                        <a:rPr sz="1100" b="1" i="0">
+                          <a:solidFill>
+                            <a:srgbClr val="2B2B2B"/>
+                          </a:solidFill>
+                          <a:latin typeface="Calibri"/>
+                        </a:rPr>
+                        <a:t>Sesión 05</a:t>
+                      </a:r>
+                      <a:r>
+                        <a:rPr sz="1100" b="0" i="0">
+                          <a:solidFill>
+                            <a:srgbClr val="2B2B2B"/>
+                          </a:solidFill>
+                          <a:latin typeface="Calibri"/>
+                        </a:rPr>
+                        <a:t> · pendiente</a:t>
+                      </a:r>
+                    </a:p>
+                  </a:txBody>
+                  <a:tcPr anchor="ctr" marL="109728" marR="91440" marT="36576" marB="36576">
+                    <a:solidFill>
+                      <a:srgbClr val="FFFFFF"/>
+                    </a:solidFill>
+                  </a:tcPr>
+                </a:tc>
+                <a:tc>
+                  <a:txBody>
+                    <a:bodyPr/>
+                    <a:lstStyle/>
+                    <a:p>
+                      <a:pPr algn="l"/>
+                      <a:r>
+                        <a:rPr sz="1100" b="1" i="0">
+                          <a:solidFill>
+                            <a:srgbClr val="2B2B2B"/>
+                          </a:solidFill>
+                          <a:latin typeface="Calibri"/>
+                        </a:rPr>
+                        <a:t>ACA Final</a:t>
+                      </a:r>
+                      <a:r>
+                        <a:rPr sz="1100" b="0" i="0">
+                          <a:solidFill>
+                            <a:srgbClr val="2B2B2B"/>
+                          </a:solidFill>
+                          <a:latin typeface="Calibri"/>
+                        </a:rPr>
+                        <a:t> · Tarea · 32,8%</a:t>
+                      </a:r>
+                    </a:p>
+                  </a:txBody>
+                  <a:tcPr anchor="ctr" marL="109728" marR="91440" marT="36576" marB="36576">
+                    <a:solidFill>
+                      <a:srgbClr val="FFFFFF"/>
+                    </a:solidFill>
+                  </a:tcPr>
+                </a:tc>
+                <a:tc>
+                  <a:txBody>
+                    <a:bodyPr/>
+                    <a:lstStyle/>
+                    <a:p>
+                      <a:pPr algn="l"/>
+                      <a:r>
+                        <a:rPr sz="1100" b="0" i="0">
+                          <a:solidFill>
+                            <a:srgbClr val="2B2B2B"/>
+                          </a:solidFill>
+                          <a:latin typeface="Calibri"/>
+                        </a:rPr>
+                        <a:t>Sube el </a:t>
+                      </a:r>
+                      <a:r>
+                        <a:rPr sz="1100" b="1" i="0">
+                          <a:solidFill>
+                            <a:srgbClr val="2B2B2B"/>
+                          </a:solidFill>
+                          <a:latin typeface="Calibri"/>
+                        </a:rPr>
+                        <a:t>artículo consolidado</a:t>
+                      </a:r>
+                      <a:r>
+                        <a:rPr sz="1100" b="0" i="0">
+                          <a:solidFill>
+                            <a:srgbClr val="2B2B2B"/>
+                          </a:solidFill>
+                          <a:latin typeface="Calibri"/>
+                        </a:rPr>
+                        <a:t>: problema, pregunta, marco, matriz de fuentes y APA 7.</a:t>
+                      </a:r>
+                    </a:p>
+                  </a:txBody>
+                  <a:tcPr anchor="ctr" marL="109728" marR="91440" marT="36576" marB="36576">
+                    <a:solidFill>
+                      <a:srgbClr val="FFFFFF"/>
+                    </a:solidFill>
+                  </a:tcPr>
+                </a:tc>
+              </a:tr>
+              <a:tr h="477520">
+                <a:tc>
+                  <a:txBody>
+                    <a:bodyPr/>
+                    <a:lstStyle/>
+                    <a:p>
+                      <a:pPr algn="l"/>
+                      <a:r>
+                        <a:rPr sz="1100" b="1" i="0">
+                          <a:solidFill>
+                            <a:srgbClr val="2B2B2B"/>
+                          </a:solidFill>
+                          <a:latin typeface="Calibri"/>
+                        </a:rPr>
+                        <a:t>Sesión 05</a:t>
+                      </a:r>
+                      <a:r>
+                        <a:rPr sz="1100" b="0" i="0">
+                          <a:solidFill>
+                            <a:srgbClr val="2B2B2B"/>
+                          </a:solidFill>
+                          <a:latin typeface="Calibri"/>
+                        </a:rPr>
+                        <a:t> · pendiente</a:t>
+                      </a:r>
+                    </a:p>
+                  </a:txBody>
+                  <a:tcPr anchor="ctr" marL="109728" marR="91440" marT="36576" marB="36576">
+                    <a:solidFill>
+                      <a:srgbClr val="F2F2F2"/>
+                    </a:solidFill>
+                  </a:tcPr>
+                </a:tc>
+                <a:tc>
+                  <a:txBody>
+                    <a:bodyPr/>
+                    <a:lstStyle/>
+                    <a:p>
+                      <a:pPr algn="l"/>
+                      <a:r>
+                        <a:rPr sz="1100" b="1" i="0">
+                          <a:solidFill>
+                            <a:srgbClr val="2B2B2B"/>
+                          </a:solidFill>
+                          <a:latin typeface="Calibri"/>
+                        </a:rPr>
+                        <a:t>Quiz 3</a:t>
+                      </a:r>
+                      <a:r>
+                        <a:rPr sz="1100" b="0" i="0">
+                          <a:solidFill>
+                            <a:srgbClr val="2B2B2B"/>
+                          </a:solidFill>
+                          <a:latin typeface="Calibri"/>
+                        </a:rPr>
+                        <a:t> · Cuestionario · 4%</a:t>
+                      </a:r>
+                    </a:p>
+                  </a:txBody>
+                  <a:tcPr anchor="ctr" marL="109728" marR="91440" marT="36576" marB="36576">
+                    <a:solidFill>
+                      <a:srgbClr val="F2F2F2"/>
+                    </a:solidFill>
+                  </a:tcPr>
+                </a:tc>
+                <a:tc>
+                  <a:txBody>
+                    <a:bodyPr/>
+                    <a:lstStyle/>
+                    <a:p>
+                      <a:pPr algn="l"/>
+                      <a:r>
+                        <a:rPr sz="1100" b="0" i="0">
+                          <a:solidFill>
+                            <a:srgbClr val="2B2B2B"/>
+                          </a:solidFill>
+                          <a:latin typeface="Calibri"/>
+                        </a:rPr>
+                        <a:t>Ten claras las partes del </a:t>
+                      </a:r>
+                      <a:r>
+                        <a:rPr sz="1100" b="1" i="0">
+                          <a:solidFill>
+                            <a:srgbClr val="2B2B2B"/>
+                          </a:solidFill>
+                          <a:latin typeface="Calibri"/>
+                        </a:rPr>
+                        <a:t>planteamiento</a:t>
+                      </a:r>
+                      <a:r>
+                        <a:rPr sz="1100" b="0" i="0">
+                          <a:solidFill>
+                            <a:srgbClr val="2B2B2B"/>
+                          </a:solidFill>
+                          <a:latin typeface="Calibri"/>
+                        </a:rPr>
+                        <a:t> y qué es una revisión de literatura articulada.</a:t>
+                      </a:r>
+                    </a:p>
+                  </a:txBody>
+                  <a:tcPr anchor="ctr" marL="109728" marR="91440" marT="36576" marB="36576">
+                    <a:solidFill>
+                      <a:srgbClr val="F2F2F2"/>
+                    </a:solidFill>
+                  </a:tcPr>
+                </a:tc>
+              </a:tr>
+              <a:tr h="477520">
+                <a:tc>
+                  <a:txBody>
+                    <a:bodyPr/>
+                    <a:lstStyle/>
+                    <a:p>
+                      <a:pPr algn="l"/>
+                      <a:r>
+                        <a:rPr sz="1100" b="1" i="0">
+                          <a:solidFill>
+                            <a:srgbClr val="2B2B2B"/>
+                          </a:solidFill>
+                          <a:latin typeface="Calibri"/>
+                        </a:rPr>
+                        <a:t>Sesión 06</a:t>
+                      </a:r>
+                      <a:r>
+                        <a:rPr sz="1100" b="0" i="0">
+                          <a:solidFill>
+                            <a:srgbClr val="2B2B2B"/>
+                          </a:solidFill>
+                          <a:latin typeface="Calibri"/>
+                        </a:rPr>
+                        <a:t> · pendiente</a:t>
+                      </a:r>
+                    </a:p>
+                  </a:txBody>
+                  <a:tcPr anchor="ctr" marL="109728" marR="91440" marT="36576" marB="36576">
+                    <a:solidFill>
+                      <a:srgbClr val="FFFFFF"/>
+                    </a:solidFill>
+                  </a:tcPr>
+                </a:tc>
+                <a:tc>
+                  <a:txBody>
+                    <a:bodyPr/>
+                    <a:lstStyle/>
+                    <a:p>
+                      <a:pPr algn="l"/>
+                      <a:r>
+                        <a:rPr sz="1100" b="1" i="0">
+                          <a:solidFill>
+                            <a:srgbClr val="2B2B2B"/>
+                          </a:solidFill>
+                          <a:latin typeface="Calibri"/>
+                        </a:rPr>
+                        <a:t>Autoevaluación</a:t>
+                      </a:r>
+                      <a:r>
+                        <a:rPr sz="1100" b="0" i="0">
+                          <a:solidFill>
+                            <a:srgbClr val="2B2B2B"/>
+                          </a:solidFill>
+                          <a:latin typeface="Calibri"/>
+                        </a:rPr>
+                        <a:t> · Cuestionario · 1,6%</a:t>
+                      </a:r>
+                    </a:p>
+                  </a:txBody>
+                  <a:tcPr anchor="ctr" marL="109728" marR="91440" marT="36576" marB="36576">
+                    <a:solidFill>
+                      <a:srgbClr val="FFFFFF"/>
+                    </a:solidFill>
+                  </a:tcPr>
+                </a:tc>
+                <a:tc>
+                  <a:txBody>
+                    <a:bodyPr/>
+                    <a:lstStyle/>
+                    <a:p>
+                      <a:pPr algn="l"/>
+                      <a:r>
+                        <a:rPr sz="1100" b="0" i="0">
+                          <a:solidFill>
+                            <a:srgbClr val="2B2B2B"/>
+                          </a:solidFill>
+                          <a:latin typeface="Calibri"/>
+                        </a:rPr>
+                        <a:t>Diligénciala tú, según tu </a:t>
+                      </a:r>
+                      <a:r>
+                        <a:rPr sz="1100" b="1" i="0">
+                          <a:solidFill>
+                            <a:srgbClr val="2B2B2B"/>
+                          </a:solidFill>
+                          <a:latin typeface="Calibri"/>
+                        </a:rPr>
+                        <a:t>participación real</a:t>
+                      </a:r>
+                      <a:r>
+                        <a:rPr sz="1100" b="0" i="0">
+                          <a:solidFill>
+                            <a:srgbClr val="2B2B2B"/>
+                          </a:solidFill>
+                          <a:latin typeface="Calibri"/>
+                        </a:rPr>
+                        <a:t> en el periodo.</a:t>
+                      </a:r>
+                    </a:p>
+                  </a:txBody>
+                  <a:tcPr anchor="ctr" marL="109728" marR="91440" marT="36576" marB="36576">
+                    <a:solidFill>
+                      <a:srgbClr val="FFFFFF"/>
+                    </a:solidFill>
+                  </a:tcPr>
+                </a:tc>
+              </a:tr>
+              <a:tr h="477520">
+                <a:tc>
+                  <a:txBody>
+                    <a:bodyPr/>
+                    <a:lstStyle/>
+                    <a:p>
+                      <a:pPr algn="l"/>
+                      <a:r>
+                        <a:rPr sz="1100" b="1" i="0">
+                          <a:solidFill>
+                            <a:srgbClr val="2B2B2B"/>
+                          </a:solidFill>
+                          <a:latin typeface="Calibri"/>
+                        </a:rPr>
+                        <a:t>Sesión 06</a:t>
+                      </a:r>
+                      <a:r>
+                        <a:rPr sz="1100" b="0" i="0">
+                          <a:solidFill>
+                            <a:srgbClr val="2B2B2B"/>
+                          </a:solidFill>
+                          <a:latin typeface="Calibri"/>
+                        </a:rPr>
+                        <a:t> · pendiente</a:t>
+                      </a:r>
+                    </a:p>
+                  </a:txBody>
+                  <a:tcPr anchor="ctr" marL="109728" marR="91440" marT="36576" marB="36576">
+                    <a:solidFill>
+                      <a:srgbClr val="F2F2F2"/>
+                    </a:solidFill>
+                  </a:tcPr>
+                </a:tc>
+                <a:tc>
+                  <a:txBody>
+                    <a:bodyPr/>
+                    <a:lstStyle/>
+                    <a:p>
+                      <a:pPr algn="l"/>
+                      <a:r>
+                        <a:rPr sz="1100" b="1" i="0">
+                          <a:solidFill>
+                            <a:srgbClr val="2B2B2B"/>
+                          </a:solidFill>
+                          <a:latin typeface="Calibri"/>
+                        </a:rPr>
+                        <a:t>Coevaluación</a:t>
+                      </a:r>
+                      <a:r>
+                        <a:rPr sz="1100" b="0" i="0">
+                          <a:solidFill>
+                            <a:srgbClr val="2B2B2B"/>
+                          </a:solidFill>
+                          <a:latin typeface="Calibri"/>
+                        </a:rPr>
+                        <a:t> · Foro · 1,6%</a:t>
+                      </a:r>
+                    </a:p>
+                  </a:txBody>
+                  <a:tcPr anchor="ctr" marL="109728" marR="91440" marT="36576" marB="36576">
+                    <a:solidFill>
+                      <a:srgbClr val="F2F2F2"/>
+                    </a:solidFill>
+                  </a:tcPr>
+                </a:tc>
+                <a:tc>
+                  <a:txBody>
+                    <a:bodyPr/>
+                    <a:lstStyle/>
+                    <a:p>
+                      <a:pPr algn="l"/>
+                      <a:r>
+                        <a:rPr sz="1100" b="1" i="0">
+                          <a:solidFill>
+                            <a:srgbClr val="2B2B2B"/>
+                          </a:solidFill>
+                          <a:latin typeface="Calibri"/>
+                        </a:rPr>
+                        <a:t>Publica tu aporte</a:t>
+                      </a:r>
+                      <a:r>
+                        <a:rPr sz="1100" b="0" i="0">
+                          <a:solidFill>
+                            <a:srgbClr val="2B2B2B"/>
+                          </a:solidFill>
+                          <a:latin typeface="Calibri"/>
+                        </a:rPr>
+                        <a:t>: valora con respeto hechos del trabajo del equipo, no personas.</a:t>
+                      </a:r>
+                    </a:p>
+                  </a:txBody>
+                  <a:tcPr anchor="ctr" marL="109728" marR="91440" marT="36576" marB="36576">
+                    <a:solidFill>
+                      <a:srgbClr val="F2F2F2"/>
+                    </a:solidFill>
+                  </a:tcPr>
+                </a:tc>
+              </a:tr>
+            </a:tbl>
+          </a:graphicData>
+        </a:graphic>
+      </p:graphicFrame>
+      <p:sp>
+        <p:nvSpPr>
+          <p:cNvPr id="6" name="TextBox 5"/>
+          <p:cNvSpPr txBox="1"/>
+          <p:nvPr/>
+        </p:nvSpPr>
+        <p:spPr>
+          <a:xfrm>
+            <a:off x="640080" y="6080760"/>
+            <a:ext cx="10911535" cy="548640"/>
+          </a:xfrm>
+          <a:prstGeom prst="rect">
+            <a:avLst/>
+          </a:prstGeom>
+          <a:noFill/>
+        </p:spPr>
+        <p:txBody>
+          <a:bodyPr wrap="square" anchor="t" lIns="0" rIns="0" tIns="0" bIns="0">
+            <a:spAutoFit/>
+          </a:bodyPr>
+          <a:lstStyle/>
+          <a:p>
+            <a:r>
+              <a:rPr sz="1200" b="0" i="1">
+                <a:solidFill>
+                  <a:srgbClr val="2B2B2B"/>
+                </a:solidFill>
+                <a:latin typeface="Calibri"/>
+              </a:rPr>
+              <a:t>Esta misma tabla va al final de todas las sesiones. La </a:t>
+            </a:r>
+            <a:r>
+              <a:rPr sz="1200" b="1" i="1">
+                <a:solidFill>
+                  <a:srgbClr val="2B2B2B"/>
+                </a:solidFill>
+                <a:latin typeface="Calibri"/>
+              </a:rPr>
+              <a:t>fecha</a:t>
+            </a:r>
+            <a:r>
+              <a:rPr sz="1200" b="0" i="1">
+                <a:solidFill>
+                  <a:srgbClr val="2B2B2B"/>
+                </a:solidFill>
+                <a:latin typeface="Calibri"/>
+              </a:rPr>
+              <a:t> de cada ventana está en el enunciado del ítem (`Clases/Recursos/ACAs/`) y en el aula: si el aula y cualquier otro material se contradicen, </a:t>
+            </a:r>
+            <a:r>
+              <a:rPr sz="1200" b="1" i="1">
+                <a:solidFill>
+                  <a:srgbClr val="2B2B2B"/>
+                </a:solidFill>
+                <a:latin typeface="Calibri"/>
+              </a:rPr>
+              <a:t>manda el aula</a:t>
+            </a:r>
+            <a:r>
+              <a:rPr sz="1200" b="0" i="1">
+                <a:solidFill>
+                  <a:srgbClr val="2B2B2B"/>
+                </a:solidFill>
+                <a:latin typeface="Calibri"/>
+              </a:rPr>
+              <a:t>.</a:t>
+            </a:r>
+          </a:p>
+        </p:txBody>
+      </p:sp>
+      <p:sp>
+        <p:nvSpPr>
+          <p:cNvPr id="7" name="TextBox 6"/>
+          <p:cNvSpPr txBox="1"/>
+          <p:nvPr/>
+        </p:nvSpPr>
+        <p:spPr>
+          <a:xfrm>
+            <a:off x="11094415" y="6446520"/>
+            <a:ext cx="548640" cy="274320"/>
+          </a:xfrm>
+          <a:prstGeom prst="rect">
+            <a:avLst/>
+          </a:prstGeom>
+          <a:noFill/>
+        </p:spPr>
+        <p:txBody>
+          <a:bodyPr wrap="square" anchor="t" lIns="0" rIns="0" tIns="0" bIns="0">
+            <a:spAutoFit/>
+          </a:bodyPr>
+          <a:lstStyle/>
+          <a:p>
+            <a:pPr algn="r"/>
+            <a:r>
+              <a:rPr sz="1000" b="1" i="0">
+                <a:solidFill>
+                  <a:srgbClr val="8F989D"/>
+                </a:solidFill>
+                <a:latin typeface="Calibri"/>
+              </a:rPr>
+              <a:t>32</a:t>
+            </a:r>
+          </a:p>
+        </p:txBody>
+      </p:sp>
+    </p:spTree>
+  </p:cSld>
+  <p:clrMapOvr>
+    <a:masterClrMapping/>
+  </p:clrMapOvr>
+</p:sld>
+</file>
+
+<file path=ppt/slides/slide33.xml><?xml version="1.0" encoding="utf-8"?>
 <p:sld xmlns:a="http://schemas.openxmlformats.org/drawingml/2006/main" xmlns:p="http://schemas.openxmlformats.org/presentationml/2006/main" xmlns:r="http://schemas.openxmlformats.org/officeDocument/2006/relationships">
   <p:cSld>
     <p:bg>
